--- a/dist/초1/수학/시간과규칙/초1_수학_시간과규칙_01_몇시와몇시30분_학생용.pptx
+++ b/dist/초1/수학/시간과규칙/초1_수학_시간과규칙_01_몇시와몇시30분_학생용.pptx
@@ -121,13 +121,13 @@
   <p:extLst>
     <p:ext uri="{521415D9-36F7-43E2-AB2F-B90AF26B5E84}">
       <p14:sectionLst xmlns:p14="http://schemas.microsoft.com/office/powerpoint/2010/main">
-        <p14:section name="도입" id="{e7c16e4b-b563-933f-6291-72ae257f2398}">
+        <p14:section name="도입" id="{93067bfd-ca4f-fd82-f4c6-9ee348cb9676}">
           <p14:sldIdLst>
             <p14:sldId id="256"/>
             <p14:sldId id="257"/>
           </p14:sldIdLst>
         </p14:section>
-        <p14:section name="개념" id="{b757f73e-607d-b7b0-2afb-f7bd74b71220}">
+        <p14:section name="개념" id="{a2926eb3-74e3-f7b6-037c-6de1b59eecfe}">
           <p14:sldIdLst>
             <p14:sldId id="258"/>
             <p14:sldId id="259"/>
@@ -137,31 +137,31 @@
             <p14:sldId id="264"/>
           </p14:sldIdLst>
         </p14:section>
-        <p14:section name="연습" id="{7d295dbe-30ba-f516-10fd-cefa23e3881a}">
+        <p14:section name="연습" id="{4f722b8d-1d10-5992-a095-c726d1edc71d}">
           <p14:sldIdLst>
             <p14:sldId id="261"/>
             <p14:sldId id="265"/>
             <p14:sldId id="266"/>
           </p14:sldIdLst>
         </p14:section>
-        <p14:section name="개념" id="{470f4de0-2dec-18cd-2a66-dc6bfb261302}">
+        <p14:section name="개념" id="{ecc1d203-a35e-219f-bf2b-6c1d2ac9da57}">
           <p14:sldIdLst/>
         </p14:section>
-        <p14:section name="연습" id="{f660d9e8-de16-507c-0dd4-8bb1ef2f6b1b}">
+        <p14:section name="연습" id="{f0b1035b-5abe-c8f2-ef1d-7854d979f71a}">
           <p14:sldIdLst/>
         </p14:section>
-        <p14:section name="확인" id="{18cfd707-42db-f11f-5e37-48b6de80d726}">
+        <p14:section name="확인" id="{2cda7c53-eb4c-42c7-5330-89b5417f7708}">
           <p14:sldIdLst>
             <p14:sldId id="267"/>
             <p14:sldId id="268"/>
           </p14:sldIdLst>
         </p14:section>
-        <p14:section name="정리" id="{5e264b3f-051b-79c8-7f6e-0ca332e1cb8a}">
+        <p14:section name="정리" id="{658b4bf7-bec8-06f8-1af1-c2a3ddbdbfc3}">
           <p14:sldIdLst>
             <p14:sldId id="269"/>
           </p14:sldIdLst>
         </p14:section>
-        <p14:section name="보충" id="{f93c2330-7324-71a1-3757-c45241e55abb}">
+        <p14:section name="보충" id="{143cffb3-07cf-129b-826e-ad29966639f1}">
           <p14:sldIdLst>
             <p14:sldId id="270"/>
           </p14:sldIdLst>
@@ -4353,7 +4353,7 @@
         </p:nvSpPr>
         <p:spPr>
           <a:xfrm>
-            <a:off x="9913925" y="982638"/>
+            <a:off x="9950501" y="919286"/>
             <a:ext cx="548640" cy="365760"/>
           </a:xfrm>
           <a:prstGeom prst="rect">
@@ -4392,7 +4392,7 @@
         </p:nvSpPr>
         <p:spPr>
           <a:xfrm>
-            <a:off x="10310202" y="1378915"/>
+            <a:off x="10373554" y="1342339"/>
             <a:ext cx="548640" cy="365760"/>
           </a:xfrm>
           <a:prstGeom prst="rect">
@@ -4431,7 +4431,7 @@
         </p:nvSpPr>
         <p:spPr>
           <a:xfrm>
-            <a:off x="10455250" y="1920240"/>
+            <a:off x="10528402" y="1920240"/>
             <a:ext cx="548640" cy="365760"/>
           </a:xfrm>
           <a:prstGeom prst="rect">
@@ -4470,7 +4470,7 @@
         </p:nvSpPr>
         <p:spPr>
           <a:xfrm>
-            <a:off x="10310202" y="2461565"/>
+            <a:off x="10373554" y="2498141"/>
             <a:ext cx="548640" cy="365760"/>
           </a:xfrm>
           <a:prstGeom prst="rect">
@@ -4509,7 +4509,7 @@
         </p:nvSpPr>
         <p:spPr>
           <a:xfrm>
-            <a:off x="9913925" y="2857842"/>
+            <a:off x="9950501" y="2921194"/>
             <a:ext cx="548640" cy="365760"/>
           </a:xfrm>
           <a:prstGeom prst="rect">
@@ -4548,7 +4548,7 @@
         </p:nvSpPr>
         <p:spPr>
           <a:xfrm>
-            <a:off x="9372600" y="3002890"/>
+            <a:off x="9372600" y="3076042"/>
             <a:ext cx="548640" cy="365760"/>
           </a:xfrm>
           <a:prstGeom prst="rect">
@@ -4587,7 +4587,7 @@
         </p:nvSpPr>
         <p:spPr>
           <a:xfrm>
-            <a:off x="8831275" y="2857842"/>
+            <a:off x="8794699" y="2921194"/>
             <a:ext cx="548640" cy="365760"/>
           </a:xfrm>
           <a:prstGeom prst="rect">
@@ -4626,7 +4626,7 @@
         </p:nvSpPr>
         <p:spPr>
           <a:xfrm>
-            <a:off x="8434998" y="2461565"/>
+            <a:off x="8371646" y="2498141"/>
             <a:ext cx="548640" cy="365760"/>
           </a:xfrm>
           <a:prstGeom prst="rect">
@@ -4665,7 +4665,7 @@
         </p:nvSpPr>
         <p:spPr>
           <a:xfrm>
-            <a:off x="8289950" y="1920240"/>
+            <a:off x="8216798" y="1920240"/>
             <a:ext cx="548640" cy="365760"/>
           </a:xfrm>
           <a:prstGeom prst="rect">
@@ -4704,7 +4704,7 @@
         </p:nvSpPr>
         <p:spPr>
           <a:xfrm>
-            <a:off x="8434998" y="1378915"/>
+            <a:off x="8371646" y="1342339"/>
             <a:ext cx="548640" cy="365760"/>
           </a:xfrm>
           <a:prstGeom prst="rect">
@@ -4743,7 +4743,7 @@
         </p:nvSpPr>
         <p:spPr>
           <a:xfrm>
-            <a:off x="8831275" y="982638"/>
+            <a:off x="8794699" y="919286"/>
             <a:ext cx="548640" cy="365760"/>
           </a:xfrm>
           <a:prstGeom prst="rect">
@@ -4782,7 +4782,7 @@
         </p:nvSpPr>
         <p:spPr>
           <a:xfrm>
-            <a:off x="9372600" y="837590"/>
+            <a:off x="9372600" y="764438"/>
             <a:ext cx="548640" cy="365760"/>
           </a:xfrm>
           <a:prstGeom prst="rect">
@@ -4822,7 +4822,7 @@
         <p:spPr>
           <a:xfrm>
             <a:off x="9646920" y="2103120"/>
-            <a:ext cx="731520" cy="0"/>
+            <a:ext cx="643738" cy="0"/>
           </a:xfrm>
           <a:prstGeom prst="line">
             <a:avLst/>
@@ -4844,8 +4844,8 @@
         </p:nvSpPr>
         <p:spPr>
           <a:xfrm flipV="1">
-            <a:off x="9646920" y="961949"/>
-            <a:ext cx="0" cy="1141171"/>
+            <a:off x="9646920" y="1166774"/>
+            <a:ext cx="0" cy="936346"/>
           </a:xfrm>
           <a:prstGeom prst="line">
             <a:avLst/>
@@ -6541,7 +6541,7 @@
         </p:nvSpPr>
         <p:spPr>
           <a:xfrm>
-            <a:off x="2591410" y="1784717"/>
+            <a:off x="2630272" y="1717406"/>
             <a:ext cx="548640" cy="365760"/>
           </a:xfrm>
           <a:prstGeom prst="rect">
@@ -6580,7 +6580,7 @@
         </p:nvSpPr>
         <p:spPr>
           <a:xfrm>
-            <a:off x="3012454" y="2205761"/>
+            <a:off x="3079765" y="2166899"/>
             <a:ext cx="548640" cy="365760"/>
           </a:xfrm>
           <a:prstGeom prst="rect">
@@ -6619,7 +6619,7 @@
         </p:nvSpPr>
         <p:spPr>
           <a:xfrm>
-            <a:off x="3166567" y="2780919"/>
+            <a:off x="3244291" y="2780919"/>
             <a:ext cx="548640" cy="365760"/>
           </a:xfrm>
           <a:prstGeom prst="rect">
@@ -6658,7 +6658,7 @@
         </p:nvSpPr>
         <p:spPr>
           <a:xfrm>
-            <a:off x="3012454" y="3356077"/>
+            <a:off x="3079765" y="3394939"/>
             <a:ext cx="548640" cy="365760"/>
           </a:xfrm>
           <a:prstGeom prst="rect">
@@ -6697,7 +6697,7 @@
         </p:nvSpPr>
         <p:spPr>
           <a:xfrm>
-            <a:off x="2591410" y="3777121"/>
+            <a:off x="2630272" y="3844432"/>
             <a:ext cx="548640" cy="365760"/>
           </a:xfrm>
           <a:prstGeom prst="rect">
@@ -6736,7 +6736,7 @@
         </p:nvSpPr>
         <p:spPr>
           <a:xfrm>
-            <a:off x="2016252" y="3931234"/>
+            <a:off x="2016252" y="4008958"/>
             <a:ext cx="548640" cy="365760"/>
           </a:xfrm>
           <a:prstGeom prst="rect">
@@ -6775,7 +6775,7 @@
         </p:nvSpPr>
         <p:spPr>
           <a:xfrm>
-            <a:off x="1441094" y="3777121"/>
+            <a:off x="1402232" y="3844432"/>
             <a:ext cx="548640" cy="365760"/>
           </a:xfrm>
           <a:prstGeom prst="rect">
@@ -6814,7 +6814,7 @@
         </p:nvSpPr>
         <p:spPr>
           <a:xfrm>
-            <a:off x="1020050" y="3356077"/>
+            <a:off x="952739" y="3394939"/>
             <a:ext cx="548640" cy="365760"/>
           </a:xfrm>
           <a:prstGeom prst="rect">
@@ -6853,7 +6853,7 @@
         </p:nvSpPr>
         <p:spPr>
           <a:xfrm>
-            <a:off x="865937" y="2780919"/>
+            <a:off x="788213" y="2780919"/>
             <a:ext cx="548640" cy="365760"/>
           </a:xfrm>
           <a:prstGeom prst="rect">
@@ -6892,7 +6892,7 @@
         </p:nvSpPr>
         <p:spPr>
           <a:xfrm>
-            <a:off x="1020050" y="2205761"/>
+            <a:off x="952739" y="2166899"/>
             <a:ext cx="548640" cy="365760"/>
           </a:xfrm>
           <a:prstGeom prst="rect">
@@ -6931,7 +6931,7 @@
         </p:nvSpPr>
         <p:spPr>
           <a:xfrm>
-            <a:off x="1441094" y="1784717"/>
+            <a:off x="1402232" y="1717406"/>
             <a:ext cx="548640" cy="365760"/>
           </a:xfrm>
           <a:prstGeom prst="rect">
@@ -6970,7 +6970,7 @@
         </p:nvSpPr>
         <p:spPr>
           <a:xfrm>
-            <a:off x="2016252" y="1630604"/>
+            <a:off x="2016252" y="1552880"/>
             <a:ext cx="548640" cy="365760"/>
           </a:xfrm>
           <a:prstGeom prst="rect">
@@ -7009,8 +7009,8 @@
         </p:nvSpPr>
         <p:spPr>
           <a:xfrm flipV="1">
-            <a:off x="2290572" y="2414207"/>
-            <a:ext cx="549592" cy="549592"/>
+            <a:off x="2290572" y="2480158"/>
+            <a:ext cx="483641" cy="483641"/>
           </a:xfrm>
           <a:prstGeom prst="line">
             <a:avLst/>
@@ -7033,7 +7033,7 @@
         <p:spPr>
           <a:xfrm>
             <a:off x="2290572" y="2963799"/>
-            <a:ext cx="0" cy="1212494"/>
+            <a:ext cx="0" cy="994867"/>
           </a:xfrm>
           <a:prstGeom prst="line">
             <a:avLst/>
@@ -8524,7 +8524,7 @@
         </p:nvSpPr>
         <p:spPr>
           <a:xfrm>
-            <a:off x="6395314" y="1784717"/>
+            <a:off x="6434176" y="1717406"/>
             <a:ext cx="548640" cy="365760"/>
           </a:xfrm>
           <a:prstGeom prst="rect">
@@ -8563,7 +8563,7 @@
         </p:nvSpPr>
         <p:spPr>
           <a:xfrm>
-            <a:off x="6816358" y="2205761"/>
+            <a:off x="6883669" y="2166899"/>
             <a:ext cx="548640" cy="365760"/>
           </a:xfrm>
           <a:prstGeom prst="rect">
@@ -8602,7 +8602,7 @@
         </p:nvSpPr>
         <p:spPr>
           <a:xfrm>
-            <a:off x="6970471" y="2780919"/>
+            <a:off x="7048195" y="2780919"/>
             <a:ext cx="548640" cy="365760"/>
           </a:xfrm>
           <a:prstGeom prst="rect">
@@ -8641,7 +8641,7 @@
         </p:nvSpPr>
         <p:spPr>
           <a:xfrm>
-            <a:off x="6816358" y="3356077"/>
+            <a:off x="6883669" y="3394939"/>
             <a:ext cx="548640" cy="365760"/>
           </a:xfrm>
           <a:prstGeom prst="rect">
@@ -8680,7 +8680,7 @@
         </p:nvSpPr>
         <p:spPr>
           <a:xfrm>
-            <a:off x="6395314" y="3777121"/>
+            <a:off x="6434176" y="3844432"/>
             <a:ext cx="548640" cy="365760"/>
           </a:xfrm>
           <a:prstGeom prst="rect">
@@ -8719,7 +8719,7 @@
         </p:nvSpPr>
         <p:spPr>
           <a:xfrm>
-            <a:off x="5820156" y="3931234"/>
+            <a:off x="5820156" y="4008958"/>
             <a:ext cx="548640" cy="365760"/>
           </a:xfrm>
           <a:prstGeom prst="rect">
@@ -8758,7 +8758,7 @@
         </p:nvSpPr>
         <p:spPr>
           <a:xfrm>
-            <a:off x="5244998" y="3777121"/>
+            <a:off x="5206136" y="3844432"/>
             <a:ext cx="548640" cy="365760"/>
           </a:xfrm>
           <a:prstGeom prst="rect">
@@ -8797,7 +8797,7 @@
         </p:nvSpPr>
         <p:spPr>
           <a:xfrm>
-            <a:off x="4823954" y="3356077"/>
+            <a:off x="4756643" y="3394939"/>
             <a:ext cx="548640" cy="365760"/>
           </a:xfrm>
           <a:prstGeom prst="rect">
@@ -8836,7 +8836,7 @@
         </p:nvSpPr>
         <p:spPr>
           <a:xfrm>
-            <a:off x="4669841" y="2780919"/>
+            <a:off x="4592117" y="2780919"/>
             <a:ext cx="548640" cy="365760"/>
           </a:xfrm>
           <a:prstGeom prst="rect">
@@ -8875,7 +8875,7 @@
         </p:nvSpPr>
         <p:spPr>
           <a:xfrm>
-            <a:off x="4823954" y="2205761"/>
+            <a:off x="4756643" y="2166899"/>
             <a:ext cx="548640" cy="365760"/>
           </a:xfrm>
           <a:prstGeom prst="rect">
@@ -8914,7 +8914,7 @@
         </p:nvSpPr>
         <p:spPr>
           <a:xfrm>
-            <a:off x="5244998" y="1784717"/>
+            <a:off x="5206136" y="1717406"/>
             <a:ext cx="548640" cy="365760"/>
           </a:xfrm>
           <a:prstGeom prst="rect">
@@ -8953,7 +8953,7 @@
         </p:nvSpPr>
         <p:spPr>
           <a:xfrm>
-            <a:off x="5820156" y="1630604"/>
+            <a:off x="5820156" y="1552880"/>
             <a:ext cx="548640" cy="365760"/>
           </a:xfrm>
           <a:prstGeom prst="rect">
@@ -8992,8 +8992,8 @@
         </p:nvSpPr>
         <p:spPr>
           <a:xfrm flipH="1" flipV="1">
-            <a:off x="5544884" y="2414207"/>
-            <a:ext cx="549592" cy="549592"/>
+            <a:off x="5610835" y="2480158"/>
+            <a:ext cx="483641" cy="483641"/>
           </a:xfrm>
           <a:prstGeom prst="line">
             <a:avLst/>
@@ -9016,7 +9016,7 @@
         <p:spPr>
           <a:xfrm>
             <a:off x="6094476" y="2963799"/>
-            <a:ext cx="0" cy="1212494"/>
+            <a:ext cx="0" cy="994867"/>
           </a:xfrm>
           <a:prstGeom prst="line">
             <a:avLst/>
@@ -10507,7 +10507,7 @@
         </p:nvSpPr>
         <p:spPr>
           <a:xfrm>
-            <a:off x="10199218" y="1784717"/>
+            <a:off x="10238080" y="1717406"/>
             <a:ext cx="548640" cy="365760"/>
           </a:xfrm>
           <a:prstGeom prst="rect">
@@ -10546,7 +10546,7 @@
         </p:nvSpPr>
         <p:spPr>
           <a:xfrm>
-            <a:off x="10620262" y="2205761"/>
+            <a:off x="10687573" y="2166899"/>
             <a:ext cx="548640" cy="365760"/>
           </a:xfrm>
           <a:prstGeom prst="rect">
@@ -10585,7 +10585,7 @@
         </p:nvSpPr>
         <p:spPr>
           <a:xfrm>
-            <a:off x="10774375" y="2780919"/>
+            <a:off x="10852099" y="2780919"/>
             <a:ext cx="548640" cy="365760"/>
           </a:xfrm>
           <a:prstGeom prst="rect">
@@ -10624,7 +10624,7 @@
         </p:nvSpPr>
         <p:spPr>
           <a:xfrm>
-            <a:off x="10620262" y="3356077"/>
+            <a:off x="10687573" y="3394939"/>
             <a:ext cx="548640" cy="365760"/>
           </a:xfrm>
           <a:prstGeom prst="rect">
@@ -10663,7 +10663,7 @@
         </p:nvSpPr>
         <p:spPr>
           <a:xfrm>
-            <a:off x="10199218" y="3777121"/>
+            <a:off x="10238080" y="3844432"/>
             <a:ext cx="548640" cy="365760"/>
           </a:xfrm>
           <a:prstGeom prst="rect">
@@ -10702,7 +10702,7 @@
         </p:nvSpPr>
         <p:spPr>
           <a:xfrm>
-            <a:off x="9624060" y="3931234"/>
+            <a:off x="9624060" y="4008958"/>
             <a:ext cx="548640" cy="365760"/>
           </a:xfrm>
           <a:prstGeom prst="rect">
@@ -10741,7 +10741,7 @@
         </p:nvSpPr>
         <p:spPr>
           <a:xfrm>
-            <a:off x="9048902" y="3777121"/>
+            <a:off x="9010040" y="3844432"/>
             <a:ext cx="548640" cy="365760"/>
           </a:xfrm>
           <a:prstGeom prst="rect">
@@ -10780,7 +10780,7 @@
         </p:nvSpPr>
         <p:spPr>
           <a:xfrm>
-            <a:off x="8627858" y="3356077"/>
+            <a:off x="8560547" y="3394939"/>
             <a:ext cx="548640" cy="365760"/>
           </a:xfrm>
           <a:prstGeom prst="rect">
@@ -10819,7 +10819,7 @@
         </p:nvSpPr>
         <p:spPr>
           <a:xfrm>
-            <a:off x="8473745" y="2780919"/>
+            <a:off x="8396021" y="2780919"/>
             <a:ext cx="548640" cy="365760"/>
           </a:xfrm>
           <a:prstGeom prst="rect">
@@ -10858,7 +10858,7 @@
         </p:nvSpPr>
         <p:spPr>
           <a:xfrm>
-            <a:off x="8627858" y="2205761"/>
+            <a:off x="8560547" y="2166899"/>
             <a:ext cx="548640" cy="365760"/>
           </a:xfrm>
           <a:prstGeom prst="rect">
@@ -10897,7 +10897,7 @@
         </p:nvSpPr>
         <p:spPr>
           <a:xfrm>
-            <a:off x="9048902" y="1784717"/>
+            <a:off x="9010040" y="1717406"/>
             <a:ext cx="548640" cy="365760"/>
           </a:xfrm>
           <a:prstGeom prst="rect">
@@ -10936,7 +10936,7 @@
         </p:nvSpPr>
         <p:spPr>
           <a:xfrm>
-            <a:off x="9624060" y="1630604"/>
+            <a:off x="9624060" y="1552880"/>
             <a:ext cx="548640" cy="365760"/>
           </a:xfrm>
           <a:prstGeom prst="rect">
@@ -10976,7 +10976,7 @@
         <p:spPr>
           <a:xfrm>
             <a:off x="9898380" y="2963799"/>
-            <a:ext cx="549592" cy="549592"/>
+            <a:ext cx="483641" cy="483641"/>
           </a:xfrm>
           <a:prstGeom prst="line">
             <a:avLst/>
@@ -10999,7 +10999,7 @@
         <p:spPr>
           <a:xfrm>
             <a:off x="9898380" y="2963799"/>
-            <a:ext cx="0" cy="1212494"/>
+            <a:ext cx="0" cy="994867"/>
           </a:xfrm>
           <a:prstGeom prst="line">
             <a:avLst/>
@@ -12673,7 +12673,7 @@
         </p:nvSpPr>
         <p:spPr>
           <a:xfrm>
-            <a:off x="3530956" y="2044178"/>
+            <a:off x="3569818" y="1976867"/>
             <a:ext cx="548640" cy="365760"/>
           </a:xfrm>
           <a:prstGeom prst="rect">
@@ -12712,7 +12712,7 @@
         </p:nvSpPr>
         <p:spPr>
           <a:xfrm>
-            <a:off x="3952000" y="2465222"/>
+            <a:off x="4019311" y="2426360"/>
             <a:ext cx="548640" cy="365760"/>
           </a:xfrm>
           <a:prstGeom prst="rect">
@@ -12751,7 +12751,7 @@
         </p:nvSpPr>
         <p:spPr>
           <a:xfrm>
-            <a:off x="4106113" y="3040380"/>
+            <a:off x="4183837" y="3040380"/>
             <a:ext cx="548640" cy="365760"/>
           </a:xfrm>
           <a:prstGeom prst="rect">
@@ -12790,7 +12790,7 @@
         </p:nvSpPr>
         <p:spPr>
           <a:xfrm>
-            <a:off x="3952000" y="3615538"/>
+            <a:off x="4019311" y="3654400"/>
             <a:ext cx="548640" cy="365760"/>
           </a:xfrm>
           <a:prstGeom prst="rect">
@@ -12829,7 +12829,7 @@
         </p:nvSpPr>
         <p:spPr>
           <a:xfrm>
-            <a:off x="3530956" y="4036582"/>
+            <a:off x="3569818" y="4103893"/>
             <a:ext cx="548640" cy="365760"/>
           </a:xfrm>
           <a:prstGeom prst="rect">
@@ -12868,7 +12868,7 @@
         </p:nvSpPr>
         <p:spPr>
           <a:xfrm>
-            <a:off x="2955798" y="4190695"/>
+            <a:off x="2955798" y="4268419"/>
             <a:ext cx="548640" cy="365760"/>
           </a:xfrm>
           <a:prstGeom prst="rect">
@@ -12907,7 +12907,7 @@
         </p:nvSpPr>
         <p:spPr>
           <a:xfrm>
-            <a:off x="2380640" y="4036582"/>
+            <a:off x="2341778" y="4103893"/>
             <a:ext cx="548640" cy="365760"/>
           </a:xfrm>
           <a:prstGeom prst="rect">
@@ -12946,7 +12946,7 @@
         </p:nvSpPr>
         <p:spPr>
           <a:xfrm>
-            <a:off x="1959596" y="3615538"/>
+            <a:off x="1892285" y="3654400"/>
             <a:ext cx="548640" cy="365760"/>
           </a:xfrm>
           <a:prstGeom prst="rect">
@@ -12985,7 +12985,7 @@
         </p:nvSpPr>
         <p:spPr>
           <a:xfrm>
-            <a:off x="1805483" y="3040380"/>
+            <a:off x="1727759" y="3040380"/>
             <a:ext cx="548640" cy="365760"/>
           </a:xfrm>
           <a:prstGeom prst="rect">
@@ -13024,7 +13024,7 @@
         </p:nvSpPr>
         <p:spPr>
           <a:xfrm>
-            <a:off x="1959596" y="2465222"/>
+            <a:off x="1892285" y="2426360"/>
             <a:ext cx="548640" cy="365760"/>
           </a:xfrm>
           <a:prstGeom prst="rect">
@@ -13063,7 +13063,7 @@
         </p:nvSpPr>
         <p:spPr>
           <a:xfrm>
-            <a:off x="2380640" y="2044178"/>
+            <a:off x="2341778" y="1976867"/>
             <a:ext cx="548640" cy="365760"/>
           </a:xfrm>
           <a:prstGeom prst="rect">
@@ -13102,7 +13102,7 @@
         </p:nvSpPr>
         <p:spPr>
           <a:xfrm>
-            <a:off x="2955798" y="1890065"/>
+            <a:off x="2955798" y="1812341"/>
             <a:ext cx="548640" cy="365760"/>
           </a:xfrm>
           <a:prstGeom prst="rect">
@@ -13142,7 +13142,7 @@
         <p:spPr>
           <a:xfrm>
             <a:off x="3230118" y="3223260"/>
-            <a:ext cx="549592" cy="549592"/>
+            <a:ext cx="483641" cy="483641"/>
           </a:xfrm>
           <a:prstGeom prst="line">
             <a:avLst/>
@@ -13165,7 +13165,7 @@
         <p:spPr>
           <a:xfrm>
             <a:off x="3230118" y="3223260"/>
-            <a:ext cx="0" cy="1212494"/>
+            <a:ext cx="0" cy="994867"/>
           </a:xfrm>
           <a:prstGeom prst="line">
             <a:avLst/>
@@ -14998,7 +14998,7 @@
         </p:nvSpPr>
         <p:spPr>
           <a:xfrm>
-            <a:off x="3492717" y="1653067"/>
+            <a:off x="3528223" y="1591569"/>
             <a:ext cx="548640" cy="365760"/>
           </a:xfrm>
           <a:prstGeom prst="rect">
@@ -15037,7 +15037,7 @@
         </p:nvSpPr>
         <p:spPr>
           <a:xfrm>
-            <a:off x="3877402" y="2037752"/>
+            <a:off x="3938900" y="2002246"/>
             <a:ext cx="548640" cy="365760"/>
           </a:xfrm>
           <a:prstGeom prst="rect">
@@ -15076,7 +15076,7 @@
         </p:nvSpPr>
         <p:spPr>
           <a:xfrm>
-            <a:off x="4018206" y="2563241"/>
+            <a:off x="4089218" y="2563241"/>
             <a:ext cx="548640" cy="365760"/>
           </a:xfrm>
           <a:prstGeom prst="rect">
@@ -15115,7 +15115,7 @@
         </p:nvSpPr>
         <p:spPr>
           <a:xfrm>
-            <a:off x="3877402" y="3088730"/>
+            <a:off x="3938900" y="3124236"/>
             <a:ext cx="548640" cy="365760"/>
           </a:xfrm>
           <a:prstGeom prst="rect">
@@ -15154,7 +15154,7 @@
         </p:nvSpPr>
         <p:spPr>
           <a:xfrm>
-            <a:off x="3492717" y="3473415"/>
+            <a:off x="3528223" y="3534913"/>
             <a:ext cx="548640" cy="365760"/>
           </a:xfrm>
           <a:prstGeom prst="rect">
@@ -15193,7 +15193,7 @@
         </p:nvSpPr>
         <p:spPr>
           <a:xfrm>
-            <a:off x="2967228" y="3614219"/>
+            <a:off x="2967228" y="3685231"/>
             <a:ext cx="548640" cy="365760"/>
           </a:xfrm>
           <a:prstGeom prst="rect">
@@ -15232,7 +15232,7 @@
         </p:nvSpPr>
         <p:spPr>
           <a:xfrm>
-            <a:off x="2441739" y="3473415"/>
+            <a:off x="2406233" y="3534913"/>
             <a:ext cx="548640" cy="365760"/>
           </a:xfrm>
           <a:prstGeom prst="rect">
@@ -15271,7 +15271,7 @@
         </p:nvSpPr>
         <p:spPr>
           <a:xfrm>
-            <a:off x="2057054" y="3088730"/>
+            <a:off x="1995556" y="3124236"/>
             <a:ext cx="548640" cy="365760"/>
           </a:xfrm>
           <a:prstGeom prst="rect">
@@ -15310,7 +15310,7 @@
         </p:nvSpPr>
         <p:spPr>
           <a:xfrm>
-            <a:off x="1916250" y="2563241"/>
+            <a:off x="1845238" y="2563241"/>
             <a:ext cx="548640" cy="365760"/>
           </a:xfrm>
           <a:prstGeom prst="rect">
@@ -15349,7 +15349,7 @@
         </p:nvSpPr>
         <p:spPr>
           <a:xfrm>
-            <a:off x="2057054" y="2037752"/>
+            <a:off x="1995556" y="2002246"/>
             <a:ext cx="548640" cy="365760"/>
           </a:xfrm>
           <a:prstGeom prst="rect">
@@ -15388,7 +15388,7 @@
         </p:nvSpPr>
         <p:spPr>
           <a:xfrm>
-            <a:off x="2441739" y="1653067"/>
+            <a:off x="2406233" y="1591569"/>
             <a:ext cx="548640" cy="365760"/>
           </a:xfrm>
           <a:prstGeom prst="rect">
@@ -15427,7 +15427,7 @@
         </p:nvSpPr>
         <p:spPr>
           <a:xfrm>
-            <a:off x="2967228" y="1512263"/>
+            <a:off x="2967228" y="1441251"/>
             <a:ext cx="548640" cy="365760"/>
           </a:xfrm>
           <a:prstGeom prst="rect">
@@ -15467,7 +15467,7 @@
         <p:spPr>
           <a:xfrm>
             <a:off x="3241548" y="2746121"/>
-            <a:ext cx="0" cy="710121"/>
+            <a:ext cx="0" cy="624906"/>
           </a:xfrm>
           <a:prstGeom prst="line">
             <a:avLst/>
@@ -15489,8 +15489,8 @@
         </p:nvSpPr>
         <p:spPr>
           <a:xfrm flipV="1">
-            <a:off x="3241548" y="1638333"/>
-            <a:ext cx="0" cy="1107788"/>
+            <a:off x="3241548" y="1837167"/>
+            <a:ext cx="0" cy="908954"/>
           </a:xfrm>
           <a:prstGeom prst="line">
             <a:avLst/>
@@ -16981,7 +16981,7 @@
         </p:nvSpPr>
         <p:spPr>
           <a:xfrm>
-            <a:off x="9198573" y="1653067"/>
+            <a:off x="9234079" y="1591569"/>
             <a:ext cx="548640" cy="365760"/>
           </a:xfrm>
           <a:prstGeom prst="rect">
@@ -17020,7 +17020,7 @@
         </p:nvSpPr>
         <p:spPr>
           <a:xfrm>
-            <a:off x="9583258" y="2037752"/>
+            <a:off x="9644756" y="2002246"/>
             <a:ext cx="548640" cy="365760"/>
           </a:xfrm>
           <a:prstGeom prst="rect">
@@ -17059,7 +17059,7 @@
         </p:nvSpPr>
         <p:spPr>
           <a:xfrm>
-            <a:off x="9724062" y="2563241"/>
+            <a:off x="9795074" y="2563241"/>
             <a:ext cx="548640" cy="365760"/>
           </a:xfrm>
           <a:prstGeom prst="rect">
@@ -17098,7 +17098,7 @@
         </p:nvSpPr>
         <p:spPr>
           <a:xfrm>
-            <a:off x="9583258" y="3088730"/>
+            <a:off x="9644756" y="3124236"/>
             <a:ext cx="548640" cy="365760"/>
           </a:xfrm>
           <a:prstGeom prst="rect">
@@ -17137,7 +17137,7 @@
         </p:nvSpPr>
         <p:spPr>
           <a:xfrm>
-            <a:off x="9198573" y="3473415"/>
+            <a:off x="9234079" y="3534913"/>
             <a:ext cx="548640" cy="365760"/>
           </a:xfrm>
           <a:prstGeom prst="rect">
@@ -17176,7 +17176,7 @@
         </p:nvSpPr>
         <p:spPr>
           <a:xfrm>
-            <a:off x="8673084" y="3614219"/>
+            <a:off x="8673084" y="3685231"/>
             <a:ext cx="548640" cy="365760"/>
           </a:xfrm>
           <a:prstGeom prst="rect">
@@ -17215,7 +17215,7 @@
         </p:nvSpPr>
         <p:spPr>
           <a:xfrm>
-            <a:off x="8147595" y="3473415"/>
+            <a:off x="8112089" y="3534913"/>
             <a:ext cx="548640" cy="365760"/>
           </a:xfrm>
           <a:prstGeom prst="rect">
@@ -17254,7 +17254,7 @@
         </p:nvSpPr>
         <p:spPr>
           <a:xfrm>
-            <a:off x="7762910" y="3088730"/>
+            <a:off x="7701412" y="3124236"/>
             <a:ext cx="548640" cy="365760"/>
           </a:xfrm>
           <a:prstGeom prst="rect">
@@ -17293,7 +17293,7 @@
         </p:nvSpPr>
         <p:spPr>
           <a:xfrm>
-            <a:off x="7622106" y="2563241"/>
+            <a:off x="7551094" y="2563241"/>
             <a:ext cx="548640" cy="365760"/>
           </a:xfrm>
           <a:prstGeom prst="rect">
@@ -17332,7 +17332,7 @@
         </p:nvSpPr>
         <p:spPr>
           <a:xfrm>
-            <a:off x="7762910" y="2037752"/>
+            <a:off x="7701412" y="2002246"/>
             <a:ext cx="548640" cy="365760"/>
           </a:xfrm>
           <a:prstGeom prst="rect">
@@ -17371,7 +17371,7 @@
         </p:nvSpPr>
         <p:spPr>
           <a:xfrm>
-            <a:off x="8147595" y="1653067"/>
+            <a:off x="8112089" y="1591569"/>
             <a:ext cx="548640" cy="365760"/>
           </a:xfrm>
           <a:prstGeom prst="rect">
@@ -17410,7 +17410,7 @@
         </p:nvSpPr>
         <p:spPr>
           <a:xfrm>
-            <a:off x="8673084" y="1512263"/>
+            <a:off x="8673084" y="1441251"/>
             <a:ext cx="548640" cy="365760"/>
           </a:xfrm>
           <a:prstGeom prst="rect">
@@ -17449,8 +17449,8 @@
         </p:nvSpPr>
         <p:spPr>
           <a:xfrm flipH="1" flipV="1">
-            <a:off x="8261480" y="2562328"/>
-            <a:ext cx="685924" cy="183793"/>
+            <a:off x="8343791" y="2584383"/>
+            <a:ext cx="603613" cy="161738"/>
           </a:xfrm>
           <a:prstGeom prst="line">
             <a:avLst/>
@@ -17473,7 +17473,7 @@
         <p:spPr>
           <a:xfrm>
             <a:off x="8947404" y="2746121"/>
-            <a:ext cx="0" cy="1107788"/>
+            <a:ext cx="0" cy="908954"/>
           </a:xfrm>
           <a:prstGeom prst="line">
             <a:avLst/>
@@ -19194,7 +19194,7 @@
         </p:nvSpPr>
         <p:spPr>
           <a:xfrm>
-            <a:off x="2572786" y="2402082"/>
+            <a:off x="2611420" y="2335167"/>
             <a:ext cx="548640" cy="365760"/>
           </a:xfrm>
           <a:prstGeom prst="rect">
@@ -19233,7 +19233,7 @@
         </p:nvSpPr>
         <p:spPr>
           <a:xfrm>
-            <a:off x="2991354" y="2820650"/>
+            <a:off x="3058269" y="2782016"/>
             <a:ext cx="548640" cy="365760"/>
           </a:xfrm>
           <a:prstGeom prst="rect">
@@ -19272,7 +19272,7 @@
         </p:nvSpPr>
         <p:spPr>
           <a:xfrm>
-            <a:off x="3144561" y="3392424"/>
+            <a:off x="3221827" y="3392424"/>
             <a:ext cx="548640" cy="365760"/>
           </a:xfrm>
           <a:prstGeom prst="rect">
@@ -19311,7 +19311,7 @@
         </p:nvSpPr>
         <p:spPr>
           <a:xfrm>
-            <a:off x="2991354" y="3964198"/>
+            <a:off x="3058269" y="4002832"/>
             <a:ext cx="548640" cy="365760"/>
           </a:xfrm>
           <a:prstGeom prst="rect">
@@ -19350,7 +19350,7 @@
         </p:nvSpPr>
         <p:spPr>
           <a:xfrm>
-            <a:off x="2572786" y="4382766"/>
+            <a:off x="2611420" y="4449681"/>
             <a:ext cx="548640" cy="365760"/>
           </a:xfrm>
           <a:prstGeom prst="rect">
@@ -19389,7 +19389,7 @@
         </p:nvSpPr>
         <p:spPr>
           <a:xfrm>
-            <a:off x="2001012" y="4535973"/>
+            <a:off x="2001012" y="4613239"/>
             <a:ext cx="548640" cy="365760"/>
           </a:xfrm>
           <a:prstGeom prst="rect">
@@ -19428,7 +19428,7 @@
         </p:nvSpPr>
         <p:spPr>
           <a:xfrm>
-            <a:off x="1429238" y="4382766"/>
+            <a:off x="1390604" y="4449681"/>
             <a:ext cx="548640" cy="365760"/>
           </a:xfrm>
           <a:prstGeom prst="rect">
@@ -19467,7 +19467,7 @@
         </p:nvSpPr>
         <p:spPr>
           <a:xfrm>
-            <a:off x="1010670" y="3964198"/>
+            <a:off x="943755" y="4002832"/>
             <a:ext cx="548640" cy="365760"/>
           </a:xfrm>
           <a:prstGeom prst="rect">
@@ -19506,7 +19506,7 @@
         </p:nvSpPr>
         <p:spPr>
           <a:xfrm>
-            <a:off x="857463" y="3392424"/>
+            <a:off x="780197" y="3392424"/>
             <a:ext cx="548640" cy="365760"/>
           </a:xfrm>
           <a:prstGeom prst="rect">
@@ -19545,7 +19545,7 @@
         </p:nvSpPr>
         <p:spPr>
           <a:xfrm>
-            <a:off x="1010670" y="2820650"/>
+            <a:off x="943755" y="2782016"/>
             <a:ext cx="548640" cy="365760"/>
           </a:xfrm>
           <a:prstGeom prst="rect">
@@ -19584,7 +19584,7 @@
         </p:nvSpPr>
         <p:spPr>
           <a:xfrm>
-            <a:off x="1429238" y="2402082"/>
+            <a:off x="1390604" y="2335167"/>
             <a:ext cx="548640" cy="365760"/>
           </a:xfrm>
           <a:prstGeom prst="rect">
@@ -19623,7 +19623,7 @@
         </p:nvSpPr>
         <p:spPr>
           <a:xfrm>
-            <a:off x="2001012" y="2248875"/>
+            <a:off x="2001012" y="2171609"/>
             <a:ext cx="548640" cy="365760"/>
           </a:xfrm>
           <a:prstGeom prst="rect">
@@ -19662,8 +19662,8 @@
         </p:nvSpPr>
         <p:spPr>
           <a:xfrm flipH="1">
-            <a:off x="1528992" y="3575304"/>
-            <a:ext cx="746340" cy="199981"/>
+            <a:off x="1618553" y="3575304"/>
+            <a:ext cx="656779" cy="175983"/>
           </a:xfrm>
           <a:prstGeom prst="line">
             <a:avLst/>
@@ -19686,7 +19686,7 @@
         <p:spPr>
           <a:xfrm>
             <a:off x="2275332" y="3575304"/>
-            <a:ext cx="0" cy="1205362"/>
+            <a:ext cx="0" cy="989015"/>
           </a:xfrm>
           <a:prstGeom prst="line">
             <a:avLst/>
@@ -21185,7 +21185,7 @@
         </p:nvSpPr>
         <p:spPr>
           <a:xfrm>
-            <a:off x="6391930" y="2402082"/>
+            <a:off x="6430564" y="2335167"/>
             <a:ext cx="548640" cy="365760"/>
           </a:xfrm>
           <a:prstGeom prst="rect">
@@ -21224,7 +21224,7 @@
         </p:nvSpPr>
         <p:spPr>
           <a:xfrm>
-            <a:off x="6810498" y="2820650"/>
+            <a:off x="6877413" y="2782016"/>
             <a:ext cx="548640" cy="365760"/>
           </a:xfrm>
           <a:prstGeom prst="rect">
@@ -21263,7 +21263,7 @@
         </p:nvSpPr>
         <p:spPr>
           <a:xfrm>
-            <a:off x="6963705" y="3392424"/>
+            <a:off x="7040971" y="3392424"/>
             <a:ext cx="548640" cy="365760"/>
           </a:xfrm>
           <a:prstGeom prst="rect">
@@ -21302,7 +21302,7 @@
         </p:nvSpPr>
         <p:spPr>
           <a:xfrm>
-            <a:off x="6810498" y="3964198"/>
+            <a:off x="6877413" y="4002832"/>
             <a:ext cx="548640" cy="365760"/>
           </a:xfrm>
           <a:prstGeom prst="rect">
@@ -21341,7 +21341,7 @@
         </p:nvSpPr>
         <p:spPr>
           <a:xfrm>
-            <a:off x="6391930" y="4382766"/>
+            <a:off x="6430564" y="4449681"/>
             <a:ext cx="548640" cy="365760"/>
           </a:xfrm>
           <a:prstGeom prst="rect">
@@ -21380,7 +21380,7 @@
         </p:nvSpPr>
         <p:spPr>
           <a:xfrm>
-            <a:off x="5820156" y="4535973"/>
+            <a:off x="5820156" y="4613239"/>
             <a:ext cx="548640" cy="365760"/>
           </a:xfrm>
           <a:prstGeom prst="rect">
@@ -21419,7 +21419,7 @@
         </p:nvSpPr>
         <p:spPr>
           <a:xfrm>
-            <a:off x="5248382" y="4382766"/>
+            <a:off x="5209748" y="4449681"/>
             <a:ext cx="548640" cy="365760"/>
           </a:xfrm>
           <a:prstGeom prst="rect">
@@ -21458,7 +21458,7 @@
         </p:nvSpPr>
         <p:spPr>
           <a:xfrm>
-            <a:off x="4829814" y="3964198"/>
+            <a:off x="4762899" y="4002832"/>
             <a:ext cx="548640" cy="365760"/>
           </a:xfrm>
           <a:prstGeom prst="rect">
@@ -21497,7 +21497,7 @@
         </p:nvSpPr>
         <p:spPr>
           <a:xfrm>
-            <a:off x="4676607" y="3392424"/>
+            <a:off x="4599341" y="3392424"/>
             <a:ext cx="548640" cy="365760"/>
           </a:xfrm>
           <a:prstGeom prst="rect">
@@ -21536,7 +21536,7 @@
         </p:nvSpPr>
         <p:spPr>
           <a:xfrm>
-            <a:off x="4829814" y="2820650"/>
+            <a:off x="4762899" y="2782016"/>
             <a:ext cx="548640" cy="365760"/>
           </a:xfrm>
           <a:prstGeom prst="rect">
@@ -21575,7 +21575,7 @@
         </p:nvSpPr>
         <p:spPr>
           <a:xfrm>
-            <a:off x="5248382" y="2402082"/>
+            <a:off x="5209748" y="2335167"/>
             <a:ext cx="548640" cy="365760"/>
           </a:xfrm>
           <a:prstGeom prst="rect">
@@ -21614,7 +21614,7 @@
         </p:nvSpPr>
         <p:spPr>
           <a:xfrm>
-            <a:off x="5820156" y="2248875"/>
+            <a:off x="5820156" y="2171609"/>
             <a:ext cx="548640" cy="365760"/>
           </a:xfrm>
           <a:prstGeom prst="rect">
@@ -21653,8 +21653,8 @@
         </p:nvSpPr>
         <p:spPr>
           <a:xfrm flipH="1" flipV="1">
-            <a:off x="5348136" y="3375323"/>
-            <a:ext cx="746340" cy="199981"/>
+            <a:off x="5437697" y="3399321"/>
+            <a:ext cx="656779" cy="175983"/>
           </a:xfrm>
           <a:prstGeom prst="line">
             <a:avLst/>
@@ -21677,7 +21677,7 @@
         <p:spPr>
           <a:xfrm>
             <a:off x="6094476" y="3575304"/>
-            <a:ext cx="0" cy="1205362"/>
+            <a:ext cx="0" cy="989015"/>
           </a:xfrm>
           <a:prstGeom prst="line">
             <a:avLst/>
@@ -23176,7 +23176,7 @@
         </p:nvSpPr>
         <p:spPr>
           <a:xfrm>
-            <a:off x="10211074" y="2402082"/>
+            <a:off x="10249708" y="2335167"/>
             <a:ext cx="548640" cy="365760"/>
           </a:xfrm>
           <a:prstGeom prst="rect">
@@ -23215,7 +23215,7 @@
         </p:nvSpPr>
         <p:spPr>
           <a:xfrm>
-            <a:off x="10629642" y="2820650"/>
+            <a:off x="10696557" y="2782016"/>
             <a:ext cx="548640" cy="365760"/>
           </a:xfrm>
           <a:prstGeom prst="rect">
@@ -23254,7 +23254,7 @@
         </p:nvSpPr>
         <p:spPr>
           <a:xfrm>
-            <a:off x="10782849" y="3392424"/>
+            <a:off x="10860115" y="3392424"/>
             <a:ext cx="548640" cy="365760"/>
           </a:xfrm>
           <a:prstGeom prst="rect">
@@ -23293,7 +23293,7 @@
         </p:nvSpPr>
         <p:spPr>
           <a:xfrm>
-            <a:off x="10629642" y="3964198"/>
+            <a:off x="10696557" y="4002832"/>
             <a:ext cx="548640" cy="365760"/>
           </a:xfrm>
           <a:prstGeom prst="rect">
@@ -23332,7 +23332,7 @@
         </p:nvSpPr>
         <p:spPr>
           <a:xfrm>
-            <a:off x="10211074" y="4382766"/>
+            <a:off x="10249708" y="4449681"/>
             <a:ext cx="548640" cy="365760"/>
           </a:xfrm>
           <a:prstGeom prst="rect">
@@ -23371,7 +23371,7 @@
         </p:nvSpPr>
         <p:spPr>
           <a:xfrm>
-            <a:off x="9639300" y="4535973"/>
+            <a:off x="9639300" y="4613239"/>
             <a:ext cx="548640" cy="365760"/>
           </a:xfrm>
           <a:prstGeom prst="rect">
@@ -23410,7 +23410,7 @@
         </p:nvSpPr>
         <p:spPr>
           <a:xfrm>
-            <a:off x="9067526" y="4382766"/>
+            <a:off x="9028892" y="4449681"/>
             <a:ext cx="548640" cy="365760"/>
           </a:xfrm>
           <a:prstGeom prst="rect">
@@ -23449,7 +23449,7 @@
         </p:nvSpPr>
         <p:spPr>
           <a:xfrm>
-            <a:off x="8648958" y="3964198"/>
+            <a:off x="8582043" y="4002832"/>
             <a:ext cx="548640" cy="365760"/>
           </a:xfrm>
           <a:prstGeom prst="rect">
@@ -23488,7 +23488,7 @@
         </p:nvSpPr>
         <p:spPr>
           <a:xfrm>
-            <a:off x="8495751" y="3392424"/>
+            <a:off x="8418485" y="3392424"/>
             <a:ext cx="548640" cy="365760"/>
           </a:xfrm>
           <a:prstGeom prst="rect">
@@ -23527,7 +23527,7 @@
         </p:nvSpPr>
         <p:spPr>
           <a:xfrm>
-            <a:off x="8648958" y="2820650"/>
+            <a:off x="8582043" y="2782016"/>
             <a:ext cx="548640" cy="365760"/>
           </a:xfrm>
           <a:prstGeom prst="rect">
@@ -23566,7 +23566,7 @@
         </p:nvSpPr>
         <p:spPr>
           <a:xfrm>
-            <a:off x="9067526" y="2402082"/>
+            <a:off x="9028892" y="2335167"/>
             <a:ext cx="548640" cy="365760"/>
           </a:xfrm>
           <a:prstGeom prst="rect">
@@ -23605,7 +23605,7 @@
         </p:nvSpPr>
         <p:spPr>
           <a:xfrm>
-            <a:off x="9639300" y="2248875"/>
+            <a:off x="9639300" y="2171609"/>
             <a:ext cx="548640" cy="365760"/>
           </a:xfrm>
           <a:prstGeom prst="rect">
@@ -23644,8 +23644,8 @@
         </p:nvSpPr>
         <p:spPr>
           <a:xfrm flipH="1">
-            <a:off x="9244470" y="3575304"/>
-            <a:ext cx="669150" cy="386334"/>
+            <a:off x="9324768" y="3575304"/>
+            <a:ext cx="588852" cy="339974"/>
           </a:xfrm>
           <a:prstGeom prst="line">
             <a:avLst/>
@@ -23667,8 +23667,8 @@
         </p:nvSpPr>
         <p:spPr>
           <a:xfrm flipV="1">
-            <a:off x="9913620" y="2369942"/>
-            <a:ext cx="0" cy="1205362"/>
+            <a:off x="9913620" y="2586289"/>
+            <a:ext cx="0" cy="989015"/>
           </a:xfrm>
           <a:prstGeom prst="line">
             <a:avLst/>
@@ -25706,7 +25706,7 @@
         </p:nvSpPr>
         <p:spPr>
           <a:xfrm>
-            <a:off x="3530956" y="2592818"/>
+            <a:off x="3569818" y="2525507"/>
             <a:ext cx="548640" cy="365760"/>
           </a:xfrm>
           <a:prstGeom prst="rect">
@@ -25745,7 +25745,7 @@
         </p:nvSpPr>
         <p:spPr>
           <a:xfrm>
-            <a:off x="3952000" y="3013862"/>
+            <a:off x="4019311" y="2975000"/>
             <a:ext cx="548640" cy="365760"/>
           </a:xfrm>
           <a:prstGeom prst="rect">
@@ -25784,7 +25784,7 @@
         </p:nvSpPr>
         <p:spPr>
           <a:xfrm>
-            <a:off x="4106113" y="3589020"/>
+            <a:off x="4183837" y="3589020"/>
             <a:ext cx="548640" cy="365760"/>
           </a:xfrm>
           <a:prstGeom prst="rect">
@@ -25823,7 +25823,7 @@
         </p:nvSpPr>
         <p:spPr>
           <a:xfrm>
-            <a:off x="3952000" y="4164178"/>
+            <a:off x="4019311" y="4203040"/>
             <a:ext cx="548640" cy="365760"/>
           </a:xfrm>
           <a:prstGeom prst="rect">
@@ -25862,7 +25862,7 @@
         </p:nvSpPr>
         <p:spPr>
           <a:xfrm>
-            <a:off x="3530956" y="4585222"/>
+            <a:off x="3569818" y="4652533"/>
             <a:ext cx="548640" cy="365760"/>
           </a:xfrm>
           <a:prstGeom prst="rect">
@@ -25901,7 +25901,7 @@
         </p:nvSpPr>
         <p:spPr>
           <a:xfrm>
-            <a:off x="2955798" y="4739335"/>
+            <a:off x="2955798" y="4817059"/>
             <a:ext cx="548640" cy="365760"/>
           </a:xfrm>
           <a:prstGeom prst="rect">
@@ -25940,7 +25940,7 @@
         </p:nvSpPr>
         <p:spPr>
           <a:xfrm>
-            <a:off x="2380640" y="4585222"/>
+            <a:off x="2341778" y="4652533"/>
             <a:ext cx="548640" cy="365760"/>
           </a:xfrm>
           <a:prstGeom prst="rect">
@@ -25979,7 +25979,7 @@
         </p:nvSpPr>
         <p:spPr>
           <a:xfrm>
-            <a:off x="1959596" y="4164178"/>
+            <a:off x="1892285" y="4203040"/>
             <a:ext cx="548640" cy="365760"/>
           </a:xfrm>
           <a:prstGeom prst="rect">
@@ -26018,7 +26018,7 @@
         </p:nvSpPr>
         <p:spPr>
           <a:xfrm>
-            <a:off x="1805483" y="3589020"/>
+            <a:off x="1727759" y="3589020"/>
             <a:ext cx="548640" cy="365760"/>
           </a:xfrm>
           <a:prstGeom prst="rect">
@@ -26057,7 +26057,7 @@
         </p:nvSpPr>
         <p:spPr>
           <a:xfrm>
-            <a:off x="1959596" y="3013862"/>
+            <a:off x="1892285" y="2975000"/>
             <a:ext cx="548640" cy="365760"/>
           </a:xfrm>
           <a:prstGeom prst="rect">
@@ -26096,7 +26096,7 @@
         </p:nvSpPr>
         <p:spPr>
           <a:xfrm>
-            <a:off x="2380640" y="2592818"/>
+            <a:off x="2341778" y="2525507"/>
             <a:ext cx="548640" cy="365760"/>
           </a:xfrm>
           <a:prstGeom prst="rect">
@@ -26135,7 +26135,7 @@
         </p:nvSpPr>
         <p:spPr>
           <a:xfrm>
-            <a:off x="2955798" y="2438705"/>
+            <a:off x="2955798" y="2360981"/>
             <a:ext cx="548640" cy="365760"/>
           </a:xfrm>
           <a:prstGeom prst="rect">
@@ -28228,7 +28228,7 @@
         </p:nvSpPr>
         <p:spPr>
           <a:xfrm>
-            <a:off x="3530956" y="2592818"/>
+            <a:off x="3569818" y="2525507"/>
             <a:ext cx="548640" cy="365760"/>
           </a:xfrm>
           <a:prstGeom prst="rect">
@@ -28267,7 +28267,7 @@
         </p:nvSpPr>
         <p:spPr>
           <a:xfrm>
-            <a:off x="3952000" y="3013862"/>
+            <a:off x="4019311" y="2975000"/>
             <a:ext cx="548640" cy="365760"/>
           </a:xfrm>
           <a:prstGeom prst="rect">
@@ -28306,7 +28306,7 @@
         </p:nvSpPr>
         <p:spPr>
           <a:xfrm>
-            <a:off x="4106113" y="3589020"/>
+            <a:off x="4183837" y="3589020"/>
             <a:ext cx="548640" cy="365760"/>
           </a:xfrm>
           <a:prstGeom prst="rect">
@@ -28345,7 +28345,7 @@
         </p:nvSpPr>
         <p:spPr>
           <a:xfrm>
-            <a:off x="3952000" y="4164178"/>
+            <a:off x="4019311" y="4203040"/>
             <a:ext cx="548640" cy="365760"/>
           </a:xfrm>
           <a:prstGeom prst="rect">
@@ -28384,7 +28384,7 @@
         </p:nvSpPr>
         <p:spPr>
           <a:xfrm>
-            <a:off x="3530956" y="4585222"/>
+            <a:off x="3569818" y="4652533"/>
             <a:ext cx="548640" cy="365760"/>
           </a:xfrm>
           <a:prstGeom prst="rect">
@@ -28423,7 +28423,7 @@
         </p:nvSpPr>
         <p:spPr>
           <a:xfrm>
-            <a:off x="2955798" y="4739335"/>
+            <a:off x="2955798" y="4817059"/>
             <a:ext cx="548640" cy="365760"/>
           </a:xfrm>
           <a:prstGeom prst="rect">
@@ -28462,7 +28462,7 @@
         </p:nvSpPr>
         <p:spPr>
           <a:xfrm>
-            <a:off x="2380640" y="4585222"/>
+            <a:off x="2341778" y="4652533"/>
             <a:ext cx="548640" cy="365760"/>
           </a:xfrm>
           <a:prstGeom prst="rect">
@@ -28501,7 +28501,7 @@
         </p:nvSpPr>
         <p:spPr>
           <a:xfrm>
-            <a:off x="1959596" y="4164178"/>
+            <a:off x="1892285" y="4203040"/>
             <a:ext cx="548640" cy="365760"/>
           </a:xfrm>
           <a:prstGeom prst="rect">
@@ -28540,7 +28540,7 @@
         </p:nvSpPr>
         <p:spPr>
           <a:xfrm>
-            <a:off x="1805483" y="3589020"/>
+            <a:off x="1727759" y="3589020"/>
             <a:ext cx="548640" cy="365760"/>
           </a:xfrm>
           <a:prstGeom prst="rect">
@@ -28579,7 +28579,7 @@
         </p:nvSpPr>
         <p:spPr>
           <a:xfrm>
-            <a:off x="1959596" y="3013862"/>
+            <a:off x="1892285" y="2975000"/>
             <a:ext cx="548640" cy="365760"/>
           </a:xfrm>
           <a:prstGeom prst="rect">
@@ -28618,7 +28618,7 @@
         </p:nvSpPr>
         <p:spPr>
           <a:xfrm>
-            <a:off x="2380640" y="2592818"/>
+            <a:off x="2341778" y="2525507"/>
             <a:ext cx="548640" cy="365760"/>
           </a:xfrm>
           <a:prstGeom prst="rect">
@@ -28657,7 +28657,7 @@
         </p:nvSpPr>
         <p:spPr>
           <a:xfrm>
-            <a:off x="2955798" y="2438705"/>
+            <a:off x="2955798" y="2360981"/>
             <a:ext cx="548640" cy="365760"/>
           </a:xfrm>
           <a:prstGeom prst="rect">
@@ -28697,7 +28697,7 @@
         <p:spPr>
           <a:xfrm>
             <a:off x="3230118" y="3771900"/>
-            <a:ext cx="777240" cy="0"/>
+            <a:ext cx="683971" cy="0"/>
           </a:xfrm>
           <a:prstGeom prst="line">
             <a:avLst/>
@@ -28719,8 +28719,8 @@
         </p:nvSpPr>
         <p:spPr>
           <a:xfrm flipV="1">
-            <a:off x="3230118" y="2559406"/>
-            <a:ext cx="0" cy="1212494"/>
+            <a:off x="3230118" y="2777033"/>
+            <a:ext cx="0" cy="994867"/>
           </a:xfrm>
           <a:prstGeom prst="line">
             <a:avLst/>
@@ -30553,7 +30553,7 @@
         </p:nvSpPr>
         <p:spPr>
           <a:xfrm>
-            <a:off x="3492717" y="1653067"/>
+            <a:off x="3528223" y="1591569"/>
             <a:ext cx="548640" cy="365760"/>
           </a:xfrm>
           <a:prstGeom prst="rect">
@@ -30592,7 +30592,7 @@
         </p:nvSpPr>
         <p:spPr>
           <a:xfrm>
-            <a:off x="3877402" y="2037752"/>
+            <a:off x="3938900" y="2002246"/>
             <a:ext cx="548640" cy="365760"/>
           </a:xfrm>
           <a:prstGeom prst="rect">
@@ -30631,7 +30631,7 @@
         </p:nvSpPr>
         <p:spPr>
           <a:xfrm>
-            <a:off x="4018206" y="2563241"/>
+            <a:off x="4089218" y="2563241"/>
             <a:ext cx="548640" cy="365760"/>
           </a:xfrm>
           <a:prstGeom prst="rect">
@@ -30670,7 +30670,7 @@
         </p:nvSpPr>
         <p:spPr>
           <a:xfrm>
-            <a:off x="3877402" y="3088730"/>
+            <a:off x="3938900" y="3124236"/>
             <a:ext cx="548640" cy="365760"/>
           </a:xfrm>
           <a:prstGeom prst="rect">
@@ -30709,7 +30709,7 @@
         </p:nvSpPr>
         <p:spPr>
           <a:xfrm>
-            <a:off x="3492717" y="3473415"/>
+            <a:off x="3528223" y="3534913"/>
             <a:ext cx="548640" cy="365760"/>
           </a:xfrm>
           <a:prstGeom prst="rect">
@@ -30748,7 +30748,7 @@
         </p:nvSpPr>
         <p:spPr>
           <a:xfrm>
-            <a:off x="2967228" y="3614219"/>
+            <a:off x="2967228" y="3685231"/>
             <a:ext cx="548640" cy="365760"/>
           </a:xfrm>
           <a:prstGeom prst="rect">
@@ -30787,7 +30787,7 @@
         </p:nvSpPr>
         <p:spPr>
           <a:xfrm>
-            <a:off x="2441739" y="3473415"/>
+            <a:off x="2406233" y="3534913"/>
             <a:ext cx="548640" cy="365760"/>
           </a:xfrm>
           <a:prstGeom prst="rect">
@@ -30826,7 +30826,7 @@
         </p:nvSpPr>
         <p:spPr>
           <a:xfrm>
-            <a:off x="2057054" y="3088730"/>
+            <a:off x="1995556" y="3124236"/>
             <a:ext cx="548640" cy="365760"/>
           </a:xfrm>
           <a:prstGeom prst="rect">
@@ -30865,7 +30865,7 @@
         </p:nvSpPr>
         <p:spPr>
           <a:xfrm>
-            <a:off x="1916250" y="2563241"/>
+            <a:off x="1845238" y="2563241"/>
             <a:ext cx="548640" cy="365760"/>
           </a:xfrm>
           <a:prstGeom prst="rect">
@@ -30904,7 +30904,7 @@
         </p:nvSpPr>
         <p:spPr>
           <a:xfrm>
-            <a:off x="2057054" y="2037752"/>
+            <a:off x="1995556" y="2002246"/>
             <a:ext cx="548640" cy="365760"/>
           </a:xfrm>
           <a:prstGeom prst="rect">
@@ -30943,7 +30943,7 @@
         </p:nvSpPr>
         <p:spPr>
           <a:xfrm>
-            <a:off x="2441739" y="1653067"/>
+            <a:off x="2406233" y="1591569"/>
             <a:ext cx="548640" cy="365760"/>
           </a:xfrm>
           <a:prstGeom prst="rect">
@@ -30982,7 +30982,7 @@
         </p:nvSpPr>
         <p:spPr>
           <a:xfrm>
-            <a:off x="2967228" y="1512263"/>
+            <a:off x="2967228" y="1441251"/>
             <a:ext cx="548640" cy="365760"/>
           </a:xfrm>
           <a:prstGeom prst="rect">
@@ -31022,7 +31022,7 @@
         <p:spPr>
           <a:xfrm>
             <a:off x="3241548" y="2746121"/>
-            <a:ext cx="710121" cy="0"/>
+            <a:ext cx="624906" cy="0"/>
           </a:xfrm>
           <a:prstGeom prst="line">
             <a:avLst/>
@@ -31044,8 +31044,8 @@
         </p:nvSpPr>
         <p:spPr>
           <a:xfrm flipV="1">
-            <a:off x="3241548" y="1638333"/>
-            <a:ext cx="0" cy="1107788"/>
+            <a:off x="3241548" y="1837167"/>
+            <a:ext cx="0" cy="908954"/>
           </a:xfrm>
           <a:prstGeom prst="line">
             <a:avLst/>
@@ -32536,7 +32536,7 @@
         </p:nvSpPr>
         <p:spPr>
           <a:xfrm>
-            <a:off x="9198573" y="1653067"/>
+            <a:off x="9234079" y="1591569"/>
             <a:ext cx="548640" cy="365760"/>
           </a:xfrm>
           <a:prstGeom prst="rect">
@@ -32575,7 +32575,7 @@
         </p:nvSpPr>
         <p:spPr>
           <a:xfrm>
-            <a:off x="9583258" y="2037752"/>
+            <a:off x="9644756" y="2002246"/>
             <a:ext cx="548640" cy="365760"/>
           </a:xfrm>
           <a:prstGeom prst="rect">
@@ -32614,7 +32614,7 @@
         </p:nvSpPr>
         <p:spPr>
           <a:xfrm>
-            <a:off x="9724062" y="2563241"/>
+            <a:off x="9795074" y="2563241"/>
             <a:ext cx="548640" cy="365760"/>
           </a:xfrm>
           <a:prstGeom prst="rect">
@@ -32653,7 +32653,7 @@
         </p:nvSpPr>
         <p:spPr>
           <a:xfrm>
-            <a:off x="9583258" y="3088730"/>
+            <a:off x="9644756" y="3124236"/>
             <a:ext cx="548640" cy="365760"/>
           </a:xfrm>
           <a:prstGeom prst="rect">
@@ -32692,7 +32692,7 @@
         </p:nvSpPr>
         <p:spPr>
           <a:xfrm>
-            <a:off x="9198573" y="3473415"/>
+            <a:off x="9234079" y="3534913"/>
             <a:ext cx="548640" cy="365760"/>
           </a:xfrm>
           <a:prstGeom prst="rect">
@@ -32731,7 +32731,7 @@
         </p:nvSpPr>
         <p:spPr>
           <a:xfrm>
-            <a:off x="8673084" y="3614219"/>
+            <a:off x="8673084" y="3685231"/>
             <a:ext cx="548640" cy="365760"/>
           </a:xfrm>
           <a:prstGeom prst="rect">
@@ -32770,7 +32770,7 @@
         </p:nvSpPr>
         <p:spPr>
           <a:xfrm>
-            <a:off x="8147595" y="3473415"/>
+            <a:off x="8112089" y="3534913"/>
             <a:ext cx="548640" cy="365760"/>
           </a:xfrm>
           <a:prstGeom prst="rect">
@@ -32809,7 +32809,7 @@
         </p:nvSpPr>
         <p:spPr>
           <a:xfrm>
-            <a:off x="7762910" y="3088730"/>
+            <a:off x="7701412" y="3124236"/>
             <a:ext cx="548640" cy="365760"/>
           </a:xfrm>
           <a:prstGeom prst="rect">
@@ -32848,7 +32848,7 @@
         </p:nvSpPr>
         <p:spPr>
           <a:xfrm>
-            <a:off x="7622106" y="2563241"/>
+            <a:off x="7551094" y="2563241"/>
             <a:ext cx="548640" cy="365760"/>
           </a:xfrm>
           <a:prstGeom prst="rect">
@@ -32887,7 +32887,7 @@
         </p:nvSpPr>
         <p:spPr>
           <a:xfrm>
-            <a:off x="7762910" y="2037752"/>
+            <a:off x="7701412" y="2002246"/>
             <a:ext cx="548640" cy="365760"/>
           </a:xfrm>
           <a:prstGeom prst="rect">
@@ -32926,7 +32926,7 @@
         </p:nvSpPr>
         <p:spPr>
           <a:xfrm>
-            <a:off x="8147595" y="1653067"/>
+            <a:off x="8112089" y="1591569"/>
             <a:ext cx="548640" cy="365760"/>
           </a:xfrm>
           <a:prstGeom prst="rect">
@@ -32965,7 +32965,7 @@
         </p:nvSpPr>
         <p:spPr>
           <a:xfrm>
-            <a:off x="8673084" y="1512263"/>
+            <a:off x="8673084" y="1441251"/>
             <a:ext cx="548640" cy="365760"/>
           </a:xfrm>
           <a:prstGeom prst="rect">
@@ -33004,8 +33004,8 @@
         </p:nvSpPr>
         <p:spPr>
           <a:xfrm flipH="1">
-            <a:off x="8332422" y="2746121"/>
-            <a:ext cx="614982" cy="355060"/>
+            <a:off x="8406219" y="2746121"/>
+            <a:ext cx="541185" cy="312453"/>
           </a:xfrm>
           <a:prstGeom prst="line">
             <a:avLst/>
@@ -33027,8 +33027,8 @@
         </p:nvSpPr>
         <p:spPr>
           <a:xfrm flipV="1">
-            <a:off x="8947404" y="1638333"/>
-            <a:ext cx="0" cy="1107788"/>
+            <a:off x="8947404" y="1837167"/>
+            <a:ext cx="0" cy="908954"/>
           </a:xfrm>
           <a:prstGeom prst="line">
             <a:avLst/>
@@ -34672,7 +34672,7 @@
         </p:nvSpPr>
         <p:spPr>
           <a:xfrm>
-            <a:off x="9581449" y="3232898"/>
+            <a:off x="9620311" y="3165587"/>
             <a:ext cx="548640" cy="365760"/>
           </a:xfrm>
           <a:prstGeom prst="rect">
@@ -34711,7 +34711,7 @@
         </p:nvSpPr>
         <p:spPr>
           <a:xfrm>
-            <a:off x="10002494" y="3653942"/>
+            <a:off x="10069805" y="3615080"/>
             <a:ext cx="548640" cy="365760"/>
           </a:xfrm>
           <a:prstGeom prst="rect">
@@ -34750,7 +34750,7 @@
         </p:nvSpPr>
         <p:spPr>
           <a:xfrm>
-            <a:off x="10156607" y="4229100"/>
+            <a:off x="10234331" y="4229100"/>
             <a:ext cx="548640" cy="365760"/>
           </a:xfrm>
           <a:prstGeom prst="rect">
@@ -34789,7 +34789,7 @@
         </p:nvSpPr>
         <p:spPr>
           <a:xfrm>
-            <a:off x="10002494" y="4804258"/>
+            <a:off x="10069805" y="4843120"/>
             <a:ext cx="548640" cy="365760"/>
           </a:xfrm>
           <a:prstGeom prst="rect">
@@ -34828,7 +34828,7 @@
         </p:nvSpPr>
         <p:spPr>
           <a:xfrm>
-            <a:off x="9581449" y="5225302"/>
+            <a:off x="9620311" y="5292613"/>
             <a:ext cx="548640" cy="365760"/>
           </a:xfrm>
           <a:prstGeom prst="rect">
@@ -34867,7 +34867,7 @@
         </p:nvSpPr>
         <p:spPr>
           <a:xfrm>
-            <a:off x="9006291" y="5379415"/>
+            <a:off x="9006291" y="5457139"/>
             <a:ext cx="548640" cy="365760"/>
           </a:xfrm>
           <a:prstGeom prst="rect">
@@ -34906,7 +34906,7 @@
         </p:nvSpPr>
         <p:spPr>
           <a:xfrm>
-            <a:off x="8431134" y="5225302"/>
+            <a:off x="8392272" y="5292613"/>
             <a:ext cx="548640" cy="365760"/>
           </a:xfrm>
           <a:prstGeom prst="rect">
@@ -34945,7 +34945,7 @@
         </p:nvSpPr>
         <p:spPr>
           <a:xfrm>
-            <a:off x="8010089" y="4804258"/>
+            <a:off x="7942778" y="4843120"/>
             <a:ext cx="548640" cy="365760"/>
           </a:xfrm>
           <a:prstGeom prst="rect">
@@ -34984,7 +34984,7 @@
         </p:nvSpPr>
         <p:spPr>
           <a:xfrm>
-            <a:off x="7855976" y="4229100"/>
+            <a:off x="7778252" y="4229100"/>
             <a:ext cx="548640" cy="365760"/>
           </a:xfrm>
           <a:prstGeom prst="rect">
@@ -35023,7 +35023,7 @@
         </p:nvSpPr>
         <p:spPr>
           <a:xfrm>
-            <a:off x="8010089" y="3653942"/>
+            <a:off x="7942778" y="3615080"/>
             <a:ext cx="548640" cy="365760"/>
           </a:xfrm>
           <a:prstGeom prst="rect">
@@ -35062,7 +35062,7 @@
         </p:nvSpPr>
         <p:spPr>
           <a:xfrm>
-            <a:off x="8431134" y="3232898"/>
+            <a:off x="8392272" y="3165587"/>
             <a:ext cx="548640" cy="365760"/>
           </a:xfrm>
           <a:prstGeom prst="rect">
@@ -35101,7 +35101,7 @@
         </p:nvSpPr>
         <p:spPr>
           <a:xfrm>
-            <a:off x="9006291" y="3078785"/>
+            <a:off x="9006291" y="3001061"/>
             <a:ext cx="548640" cy="365760"/>
           </a:xfrm>
           <a:prstGeom prst="rect">
@@ -35141,7 +35141,7 @@
         <p:spPr>
           <a:xfrm>
             <a:off x="9280611" y="4411980"/>
-            <a:ext cx="388620" cy="673110"/>
+            <a:ext cx="341986" cy="592336"/>
           </a:xfrm>
           <a:prstGeom prst="line">
             <a:avLst/>
@@ -35163,8 +35163,8 @@
         </p:nvSpPr>
         <p:spPr>
           <a:xfrm flipV="1">
-            <a:off x="9280611" y="3199486"/>
-            <a:ext cx="0" cy="1212494"/>
+            <a:off x="9280611" y="3417113"/>
+            <a:ext cx="0" cy="994867"/>
           </a:xfrm>
           <a:prstGeom prst="line">
             <a:avLst/>
@@ -36967,7 +36967,7 @@
         </p:nvSpPr>
         <p:spPr>
           <a:xfrm>
-            <a:off x="2591410" y="1784717"/>
+            <a:off x="2630272" y="1717406"/>
             <a:ext cx="548640" cy="365760"/>
           </a:xfrm>
           <a:prstGeom prst="rect">
@@ -37006,7 +37006,7 @@
         </p:nvSpPr>
         <p:spPr>
           <a:xfrm>
-            <a:off x="3012454" y="2205761"/>
+            <a:off x="3079765" y="2166899"/>
             <a:ext cx="548640" cy="365760"/>
           </a:xfrm>
           <a:prstGeom prst="rect">
@@ -37045,7 +37045,7 @@
         </p:nvSpPr>
         <p:spPr>
           <a:xfrm>
-            <a:off x="3166567" y="2780919"/>
+            <a:off x="3244291" y="2780919"/>
             <a:ext cx="548640" cy="365760"/>
           </a:xfrm>
           <a:prstGeom prst="rect">
@@ -37084,7 +37084,7 @@
         </p:nvSpPr>
         <p:spPr>
           <a:xfrm>
-            <a:off x="3012454" y="3356077"/>
+            <a:off x="3079765" y="3394939"/>
             <a:ext cx="548640" cy="365760"/>
           </a:xfrm>
           <a:prstGeom prst="rect">
@@ -37123,7 +37123,7 @@
         </p:nvSpPr>
         <p:spPr>
           <a:xfrm>
-            <a:off x="2591410" y="3777121"/>
+            <a:off x="2630272" y="3844432"/>
             <a:ext cx="548640" cy="365760"/>
           </a:xfrm>
           <a:prstGeom prst="rect">
@@ -37162,7 +37162,7 @@
         </p:nvSpPr>
         <p:spPr>
           <a:xfrm>
-            <a:off x="2016252" y="3931234"/>
+            <a:off x="2016252" y="4008958"/>
             <a:ext cx="548640" cy="365760"/>
           </a:xfrm>
           <a:prstGeom prst="rect">
@@ -37201,7 +37201,7 @@
         </p:nvSpPr>
         <p:spPr>
           <a:xfrm>
-            <a:off x="1441094" y="3777121"/>
+            <a:off x="1402232" y="3844432"/>
             <a:ext cx="548640" cy="365760"/>
           </a:xfrm>
           <a:prstGeom prst="rect">
@@ -37240,7 +37240,7 @@
         </p:nvSpPr>
         <p:spPr>
           <a:xfrm>
-            <a:off x="1020050" y="3356077"/>
+            <a:off x="952739" y="3394939"/>
             <a:ext cx="548640" cy="365760"/>
           </a:xfrm>
           <a:prstGeom prst="rect">
@@ -37279,7 +37279,7 @@
         </p:nvSpPr>
         <p:spPr>
           <a:xfrm>
-            <a:off x="865937" y="2780919"/>
+            <a:off x="788213" y="2780919"/>
             <a:ext cx="548640" cy="365760"/>
           </a:xfrm>
           <a:prstGeom prst="rect">
@@ -37318,7 +37318,7 @@
         </p:nvSpPr>
         <p:spPr>
           <a:xfrm>
-            <a:off x="1020050" y="2205761"/>
+            <a:off x="952739" y="2166899"/>
             <a:ext cx="548640" cy="365760"/>
           </a:xfrm>
           <a:prstGeom prst="rect">
@@ -37357,7 +37357,7 @@
         </p:nvSpPr>
         <p:spPr>
           <a:xfrm>
-            <a:off x="1441094" y="1784717"/>
+            <a:off x="1402232" y="1717406"/>
             <a:ext cx="548640" cy="365760"/>
           </a:xfrm>
           <a:prstGeom prst="rect">
@@ -37396,7 +37396,7 @@
         </p:nvSpPr>
         <p:spPr>
           <a:xfrm>
-            <a:off x="2016252" y="1630604"/>
+            <a:off x="2016252" y="1552880"/>
             <a:ext cx="548640" cy="365760"/>
           </a:xfrm>
           <a:prstGeom prst="rect">
@@ -37435,8 +37435,8 @@
         </p:nvSpPr>
         <p:spPr>
           <a:xfrm flipH="1">
-            <a:off x="1513332" y="2963799"/>
-            <a:ext cx="777240" cy="0"/>
+            <a:off x="1606601" y="2963799"/>
+            <a:ext cx="683971" cy="0"/>
           </a:xfrm>
           <a:prstGeom prst="line">
             <a:avLst/>
@@ -37458,8 +37458,8 @@
         </p:nvSpPr>
         <p:spPr>
           <a:xfrm flipV="1">
-            <a:off x="2290572" y="1751305"/>
-            <a:ext cx="0" cy="1212494"/>
+            <a:off x="2290572" y="1968932"/>
+            <a:ext cx="0" cy="994867"/>
           </a:xfrm>
           <a:prstGeom prst="line">
             <a:avLst/>
@@ -38950,7 +38950,7 @@
         </p:nvSpPr>
         <p:spPr>
           <a:xfrm>
-            <a:off x="6395314" y="1784717"/>
+            <a:off x="6434176" y="1717406"/>
             <a:ext cx="548640" cy="365760"/>
           </a:xfrm>
           <a:prstGeom prst="rect">
@@ -38989,7 +38989,7 @@
         </p:nvSpPr>
         <p:spPr>
           <a:xfrm>
-            <a:off x="6816358" y="2205761"/>
+            <a:off x="6883669" y="2166899"/>
             <a:ext cx="548640" cy="365760"/>
           </a:xfrm>
           <a:prstGeom prst="rect">
@@ -39028,7 +39028,7 @@
         </p:nvSpPr>
         <p:spPr>
           <a:xfrm>
-            <a:off x="6970471" y="2780919"/>
+            <a:off x="7048195" y="2780919"/>
             <a:ext cx="548640" cy="365760"/>
           </a:xfrm>
           <a:prstGeom prst="rect">
@@ -39067,7 +39067,7 @@
         </p:nvSpPr>
         <p:spPr>
           <a:xfrm>
-            <a:off x="6816358" y="3356077"/>
+            <a:off x="6883669" y="3394939"/>
             <a:ext cx="548640" cy="365760"/>
           </a:xfrm>
           <a:prstGeom prst="rect">
@@ -39106,7 +39106,7 @@
         </p:nvSpPr>
         <p:spPr>
           <a:xfrm>
-            <a:off x="6395314" y="3777121"/>
+            <a:off x="6434176" y="3844432"/>
             <a:ext cx="548640" cy="365760"/>
           </a:xfrm>
           <a:prstGeom prst="rect">
@@ -39145,7 +39145,7 @@
         </p:nvSpPr>
         <p:spPr>
           <a:xfrm>
-            <a:off x="5820156" y="3931234"/>
+            <a:off x="5820156" y="4008958"/>
             <a:ext cx="548640" cy="365760"/>
           </a:xfrm>
           <a:prstGeom prst="rect">
@@ -39184,7 +39184,7 @@
         </p:nvSpPr>
         <p:spPr>
           <a:xfrm>
-            <a:off x="5244998" y="3777121"/>
+            <a:off x="5206136" y="3844432"/>
             <a:ext cx="548640" cy="365760"/>
           </a:xfrm>
           <a:prstGeom prst="rect">
@@ -39223,7 +39223,7 @@
         </p:nvSpPr>
         <p:spPr>
           <a:xfrm>
-            <a:off x="4823954" y="3356077"/>
+            <a:off x="4756643" y="3394939"/>
             <a:ext cx="548640" cy="365760"/>
           </a:xfrm>
           <a:prstGeom prst="rect">
@@ -39262,7 +39262,7 @@
         </p:nvSpPr>
         <p:spPr>
           <a:xfrm>
-            <a:off x="4669841" y="2780919"/>
+            <a:off x="4592117" y="2780919"/>
             <a:ext cx="548640" cy="365760"/>
           </a:xfrm>
           <a:prstGeom prst="rect">
@@ -39301,7 +39301,7 @@
         </p:nvSpPr>
         <p:spPr>
           <a:xfrm>
-            <a:off x="4823954" y="2205761"/>
+            <a:off x="4756643" y="2166899"/>
             <a:ext cx="548640" cy="365760"/>
           </a:xfrm>
           <a:prstGeom prst="rect">
@@ -39340,7 +39340,7 @@
         </p:nvSpPr>
         <p:spPr>
           <a:xfrm>
-            <a:off x="5244998" y="1784717"/>
+            <a:off x="5206136" y="1717406"/>
             <a:ext cx="548640" cy="365760"/>
           </a:xfrm>
           <a:prstGeom prst="rect">
@@ -39379,7 +39379,7 @@
         </p:nvSpPr>
         <p:spPr>
           <a:xfrm>
-            <a:off x="5820156" y="1630604"/>
+            <a:off x="5820156" y="1552880"/>
             <a:ext cx="548640" cy="365760"/>
           </a:xfrm>
           <a:prstGeom prst="rect">
@@ -39418,8 +39418,8 @@
         </p:nvSpPr>
         <p:spPr>
           <a:xfrm flipV="1">
-            <a:off x="6094476" y="2575179"/>
-            <a:ext cx="673110" cy="388620"/>
+            <a:off x="6094476" y="2621813"/>
+            <a:ext cx="592336" cy="341986"/>
           </a:xfrm>
           <a:prstGeom prst="line">
             <a:avLst/>
@@ -39441,8 +39441,8 @@
         </p:nvSpPr>
         <p:spPr>
           <a:xfrm flipV="1">
-            <a:off x="6094476" y="1751305"/>
-            <a:ext cx="0" cy="1212494"/>
+            <a:off x="6094476" y="1968932"/>
+            <a:ext cx="0" cy="994867"/>
           </a:xfrm>
           <a:prstGeom prst="line">
             <a:avLst/>
@@ -40933,7 +40933,7 @@
         </p:nvSpPr>
         <p:spPr>
           <a:xfrm>
-            <a:off x="10199218" y="1784717"/>
+            <a:off x="10238080" y="1717406"/>
             <a:ext cx="548640" cy="365760"/>
           </a:xfrm>
           <a:prstGeom prst="rect">
@@ -40972,7 +40972,7 @@
         </p:nvSpPr>
         <p:spPr>
           <a:xfrm>
-            <a:off x="10620262" y="2205761"/>
+            <a:off x="10687573" y="2166899"/>
             <a:ext cx="548640" cy="365760"/>
           </a:xfrm>
           <a:prstGeom prst="rect">
@@ -41011,7 +41011,7 @@
         </p:nvSpPr>
         <p:spPr>
           <a:xfrm>
-            <a:off x="10774375" y="2780919"/>
+            <a:off x="10852099" y="2780919"/>
             <a:ext cx="548640" cy="365760"/>
           </a:xfrm>
           <a:prstGeom prst="rect">
@@ -41050,7 +41050,7 @@
         </p:nvSpPr>
         <p:spPr>
           <a:xfrm>
-            <a:off x="10620262" y="3356077"/>
+            <a:off x="10687573" y="3394939"/>
             <a:ext cx="548640" cy="365760"/>
           </a:xfrm>
           <a:prstGeom prst="rect">
@@ -41089,7 +41089,7 @@
         </p:nvSpPr>
         <p:spPr>
           <a:xfrm>
-            <a:off x="10199218" y="3777121"/>
+            <a:off x="10238080" y="3844432"/>
             <a:ext cx="548640" cy="365760"/>
           </a:xfrm>
           <a:prstGeom prst="rect">
@@ -41128,7 +41128,7 @@
         </p:nvSpPr>
         <p:spPr>
           <a:xfrm>
-            <a:off x="9624060" y="3931234"/>
+            <a:off x="9624060" y="4008958"/>
             <a:ext cx="548640" cy="365760"/>
           </a:xfrm>
           <a:prstGeom prst="rect">
@@ -41167,7 +41167,7 @@
         </p:nvSpPr>
         <p:spPr>
           <a:xfrm>
-            <a:off x="9048902" y="3777121"/>
+            <a:off x="9010040" y="3844432"/>
             <a:ext cx="548640" cy="365760"/>
           </a:xfrm>
           <a:prstGeom prst="rect">
@@ -41206,7 +41206,7 @@
         </p:nvSpPr>
         <p:spPr>
           <a:xfrm>
-            <a:off x="8627858" y="3356077"/>
+            <a:off x="8560547" y="3394939"/>
             <a:ext cx="548640" cy="365760"/>
           </a:xfrm>
           <a:prstGeom prst="rect">
@@ -41245,7 +41245,7 @@
         </p:nvSpPr>
         <p:spPr>
           <a:xfrm>
-            <a:off x="8473745" y="2780919"/>
+            <a:off x="8396021" y="2780919"/>
             <a:ext cx="548640" cy="365760"/>
           </a:xfrm>
           <a:prstGeom prst="rect">
@@ -41284,7 +41284,7 @@
         </p:nvSpPr>
         <p:spPr>
           <a:xfrm>
-            <a:off x="8627858" y="2205761"/>
+            <a:off x="8560547" y="2166899"/>
             <a:ext cx="548640" cy="365760"/>
           </a:xfrm>
           <a:prstGeom prst="rect">
@@ -41323,7 +41323,7 @@
         </p:nvSpPr>
         <p:spPr>
           <a:xfrm>
-            <a:off x="9048902" y="1784717"/>
+            <a:off x="9010040" y="1717406"/>
             <a:ext cx="548640" cy="365760"/>
           </a:xfrm>
           <a:prstGeom prst="rect">
@@ -41362,7 +41362,7 @@
         </p:nvSpPr>
         <p:spPr>
           <a:xfrm>
-            <a:off x="9624060" y="1630604"/>
+            <a:off x="9624060" y="1552880"/>
             <a:ext cx="548640" cy="365760"/>
           </a:xfrm>
           <a:prstGeom prst="rect">
@@ -41401,8 +41401,8 @@
         </p:nvSpPr>
         <p:spPr>
           <a:xfrm flipV="1">
-            <a:off x="9898380" y="2186559"/>
-            <a:ext cx="0" cy="777240"/>
+            <a:off x="9898380" y="2279828"/>
+            <a:ext cx="0" cy="683971"/>
           </a:xfrm>
           <a:prstGeom prst="line">
             <a:avLst/>
@@ -41424,8 +41424,8 @@
         </p:nvSpPr>
         <p:spPr>
           <a:xfrm flipV="1">
-            <a:off x="9898380" y="1751305"/>
-            <a:ext cx="0" cy="1212494"/>
+            <a:off x="9898380" y="1968932"/>
+            <a:ext cx="0" cy="994867"/>
           </a:xfrm>
           <a:prstGeom prst="line">
             <a:avLst/>
@@ -43099,7 +43099,7 @@
         </p:nvSpPr>
         <p:spPr>
           <a:xfrm>
-            <a:off x="3530956" y="2044178"/>
+            <a:off x="3569818" y="1976867"/>
             <a:ext cx="548640" cy="365760"/>
           </a:xfrm>
           <a:prstGeom prst="rect">
@@ -43138,7 +43138,7 @@
         </p:nvSpPr>
         <p:spPr>
           <a:xfrm>
-            <a:off x="3952000" y="2465222"/>
+            <a:off x="4019311" y="2426360"/>
             <a:ext cx="548640" cy="365760"/>
           </a:xfrm>
           <a:prstGeom prst="rect">
@@ -43177,7 +43177,7 @@
         </p:nvSpPr>
         <p:spPr>
           <a:xfrm>
-            <a:off x="4106113" y="3040380"/>
+            <a:off x="4183837" y="3040380"/>
             <a:ext cx="548640" cy="365760"/>
           </a:xfrm>
           <a:prstGeom prst="rect">
@@ -43216,7 +43216,7 @@
         </p:nvSpPr>
         <p:spPr>
           <a:xfrm>
-            <a:off x="3952000" y="3615538"/>
+            <a:off x="4019311" y="3654400"/>
             <a:ext cx="548640" cy="365760"/>
           </a:xfrm>
           <a:prstGeom prst="rect">
@@ -43255,7 +43255,7 @@
         </p:nvSpPr>
         <p:spPr>
           <a:xfrm>
-            <a:off x="3530956" y="4036582"/>
+            <a:off x="3569818" y="4103893"/>
             <a:ext cx="548640" cy="365760"/>
           </a:xfrm>
           <a:prstGeom prst="rect">
@@ -43294,7 +43294,7 @@
         </p:nvSpPr>
         <p:spPr>
           <a:xfrm>
-            <a:off x="2955798" y="4190695"/>
+            <a:off x="2955798" y="4268419"/>
             <a:ext cx="548640" cy="365760"/>
           </a:xfrm>
           <a:prstGeom prst="rect">
@@ -43333,7 +43333,7 @@
         </p:nvSpPr>
         <p:spPr>
           <a:xfrm>
-            <a:off x="2380640" y="4036582"/>
+            <a:off x="2341778" y="4103893"/>
             <a:ext cx="548640" cy="365760"/>
           </a:xfrm>
           <a:prstGeom prst="rect">
@@ -43372,7 +43372,7 @@
         </p:nvSpPr>
         <p:spPr>
           <a:xfrm>
-            <a:off x="1959596" y="3615538"/>
+            <a:off x="1892285" y="3654400"/>
             <a:ext cx="548640" cy="365760"/>
           </a:xfrm>
           <a:prstGeom prst="rect">
@@ -43411,7 +43411,7 @@
         </p:nvSpPr>
         <p:spPr>
           <a:xfrm>
-            <a:off x="1805483" y="3040380"/>
+            <a:off x="1727759" y="3040380"/>
             <a:ext cx="548640" cy="365760"/>
           </a:xfrm>
           <a:prstGeom prst="rect">
@@ -43450,7 +43450,7 @@
         </p:nvSpPr>
         <p:spPr>
           <a:xfrm>
-            <a:off x="1959596" y="2465222"/>
+            <a:off x="1892285" y="2426360"/>
             <a:ext cx="548640" cy="365760"/>
           </a:xfrm>
           <a:prstGeom prst="rect">
@@ -43489,7 +43489,7 @@
         </p:nvSpPr>
         <p:spPr>
           <a:xfrm>
-            <a:off x="2380640" y="2044178"/>
+            <a:off x="2341778" y="1976867"/>
             <a:ext cx="548640" cy="365760"/>
           </a:xfrm>
           <a:prstGeom prst="rect">
@@ -43528,7 +43528,7 @@
         </p:nvSpPr>
         <p:spPr>
           <a:xfrm>
-            <a:off x="2955798" y="1890065"/>
+            <a:off x="2955798" y="1812341"/>
             <a:ext cx="548640" cy="365760"/>
           </a:xfrm>
           <a:prstGeom prst="rect">
@@ -43568,7 +43568,7 @@
         <p:spPr>
           <a:xfrm>
             <a:off x="3230118" y="3223260"/>
-            <a:ext cx="750756" cy="201165"/>
+            <a:ext cx="660665" cy="177025"/>
           </a:xfrm>
           <a:prstGeom prst="line">
             <a:avLst/>
@@ -43591,7 +43591,7 @@
         <p:spPr>
           <a:xfrm>
             <a:off x="3230118" y="3223260"/>
-            <a:ext cx="0" cy="1212494"/>
+            <a:ext cx="0" cy="994867"/>
           </a:xfrm>
           <a:prstGeom prst="line">
             <a:avLst/>
@@ -45404,7 +45404,7 @@
         </p:nvSpPr>
         <p:spPr>
           <a:xfrm>
-            <a:off x="2591410" y="1784717"/>
+            <a:off x="2630272" y="1717406"/>
             <a:ext cx="548640" cy="365760"/>
           </a:xfrm>
           <a:prstGeom prst="rect">
@@ -45443,7 +45443,7 @@
         </p:nvSpPr>
         <p:spPr>
           <a:xfrm>
-            <a:off x="3012454" y="2205761"/>
+            <a:off x="3079765" y="2166899"/>
             <a:ext cx="548640" cy="365760"/>
           </a:xfrm>
           <a:prstGeom prst="rect">
@@ -45482,7 +45482,7 @@
         </p:nvSpPr>
         <p:spPr>
           <a:xfrm>
-            <a:off x="3166567" y="2780919"/>
+            <a:off x="3244291" y="2780919"/>
             <a:ext cx="548640" cy="365760"/>
           </a:xfrm>
           <a:prstGeom prst="rect">
@@ -45521,7 +45521,7 @@
         </p:nvSpPr>
         <p:spPr>
           <a:xfrm>
-            <a:off x="3012454" y="3356077"/>
+            <a:off x="3079765" y="3394939"/>
             <a:ext cx="548640" cy="365760"/>
           </a:xfrm>
           <a:prstGeom prst="rect">
@@ -45560,7 +45560,7 @@
         </p:nvSpPr>
         <p:spPr>
           <a:xfrm>
-            <a:off x="2591410" y="3777121"/>
+            <a:off x="2630272" y="3844432"/>
             <a:ext cx="548640" cy="365760"/>
           </a:xfrm>
           <a:prstGeom prst="rect">
@@ -45599,7 +45599,7 @@
         </p:nvSpPr>
         <p:spPr>
           <a:xfrm>
-            <a:off x="2016252" y="3931234"/>
+            <a:off x="2016252" y="4008958"/>
             <a:ext cx="548640" cy="365760"/>
           </a:xfrm>
           <a:prstGeom prst="rect">
@@ -45638,7 +45638,7 @@
         </p:nvSpPr>
         <p:spPr>
           <a:xfrm>
-            <a:off x="1441094" y="3777121"/>
+            <a:off x="1402232" y="3844432"/>
             <a:ext cx="548640" cy="365760"/>
           </a:xfrm>
           <a:prstGeom prst="rect">
@@ -45677,7 +45677,7 @@
         </p:nvSpPr>
         <p:spPr>
           <a:xfrm>
-            <a:off x="1020050" y="3356077"/>
+            <a:off x="952739" y="3394939"/>
             <a:ext cx="548640" cy="365760"/>
           </a:xfrm>
           <a:prstGeom prst="rect">
@@ -45716,7 +45716,7 @@
         </p:nvSpPr>
         <p:spPr>
           <a:xfrm>
-            <a:off x="865937" y="2780919"/>
+            <a:off x="788213" y="2780919"/>
             <a:ext cx="548640" cy="365760"/>
           </a:xfrm>
           <a:prstGeom prst="rect">
@@ -45755,7 +45755,7 @@
         </p:nvSpPr>
         <p:spPr>
           <a:xfrm>
-            <a:off x="1020050" y="2205761"/>
+            <a:off x="952739" y="2166899"/>
             <a:ext cx="548640" cy="365760"/>
           </a:xfrm>
           <a:prstGeom prst="rect">
@@ -45794,7 +45794,7 @@
         </p:nvSpPr>
         <p:spPr>
           <a:xfrm>
-            <a:off x="1441094" y="1784717"/>
+            <a:off x="1402232" y="1717406"/>
             <a:ext cx="548640" cy="365760"/>
           </a:xfrm>
           <a:prstGeom prst="rect">
@@ -45833,7 +45833,7 @@
         </p:nvSpPr>
         <p:spPr>
           <a:xfrm>
-            <a:off x="2016252" y="1630604"/>
+            <a:off x="2016252" y="1552880"/>
             <a:ext cx="548640" cy="365760"/>
           </a:xfrm>
           <a:prstGeom prst="rect">
@@ -45873,7 +45873,7 @@
         <p:spPr>
           <a:xfrm>
             <a:off x="2290572" y="2963799"/>
-            <a:ext cx="777240" cy="0"/>
+            <a:ext cx="683971" cy="0"/>
           </a:xfrm>
           <a:prstGeom prst="line">
             <a:avLst/>
@@ -45895,8 +45895,8 @@
         </p:nvSpPr>
         <p:spPr>
           <a:xfrm flipV="1">
-            <a:off x="2290572" y="1751305"/>
-            <a:ext cx="0" cy="1212494"/>
+            <a:off x="2290572" y="1968932"/>
+            <a:ext cx="0" cy="994867"/>
           </a:xfrm>
           <a:prstGeom prst="line">
             <a:avLst/>
@@ -47387,7 +47387,7 @@
         </p:nvSpPr>
         <p:spPr>
           <a:xfrm>
-            <a:off x="6395314" y="1784717"/>
+            <a:off x="6434176" y="1717406"/>
             <a:ext cx="548640" cy="365760"/>
           </a:xfrm>
           <a:prstGeom prst="rect">
@@ -47426,7 +47426,7 @@
         </p:nvSpPr>
         <p:spPr>
           <a:xfrm>
-            <a:off x="6816358" y="2205761"/>
+            <a:off x="6883669" y="2166899"/>
             <a:ext cx="548640" cy="365760"/>
           </a:xfrm>
           <a:prstGeom prst="rect">
@@ -47465,7 +47465,7 @@
         </p:nvSpPr>
         <p:spPr>
           <a:xfrm>
-            <a:off x="6970471" y="2780919"/>
+            <a:off x="7048195" y="2780919"/>
             <a:ext cx="548640" cy="365760"/>
           </a:xfrm>
           <a:prstGeom prst="rect">
@@ -47504,7 +47504,7 @@
         </p:nvSpPr>
         <p:spPr>
           <a:xfrm>
-            <a:off x="6816358" y="3356077"/>
+            <a:off x="6883669" y="3394939"/>
             <a:ext cx="548640" cy="365760"/>
           </a:xfrm>
           <a:prstGeom prst="rect">
@@ -47543,7 +47543,7 @@
         </p:nvSpPr>
         <p:spPr>
           <a:xfrm>
-            <a:off x="6395314" y="3777121"/>
+            <a:off x="6434176" y="3844432"/>
             <a:ext cx="548640" cy="365760"/>
           </a:xfrm>
           <a:prstGeom prst="rect">
@@ -47582,7 +47582,7 @@
         </p:nvSpPr>
         <p:spPr>
           <a:xfrm>
-            <a:off x="5820156" y="3931234"/>
+            <a:off x="5820156" y="4008958"/>
             <a:ext cx="548640" cy="365760"/>
           </a:xfrm>
           <a:prstGeom prst="rect">
@@ -47621,7 +47621,7 @@
         </p:nvSpPr>
         <p:spPr>
           <a:xfrm>
-            <a:off x="5244998" y="3777121"/>
+            <a:off x="5206136" y="3844432"/>
             <a:ext cx="548640" cy="365760"/>
           </a:xfrm>
           <a:prstGeom prst="rect">
@@ -47660,7 +47660,7 @@
         </p:nvSpPr>
         <p:spPr>
           <a:xfrm>
-            <a:off x="4823954" y="3356077"/>
+            <a:off x="4756643" y="3394939"/>
             <a:ext cx="548640" cy="365760"/>
           </a:xfrm>
           <a:prstGeom prst="rect">
@@ -47699,7 +47699,7 @@
         </p:nvSpPr>
         <p:spPr>
           <a:xfrm>
-            <a:off x="4669841" y="2780919"/>
+            <a:off x="4592117" y="2780919"/>
             <a:ext cx="548640" cy="365760"/>
           </a:xfrm>
           <a:prstGeom prst="rect">
@@ -47738,7 +47738,7 @@
         </p:nvSpPr>
         <p:spPr>
           <a:xfrm>
-            <a:off x="4823954" y="2205761"/>
+            <a:off x="4756643" y="2166899"/>
             <a:ext cx="548640" cy="365760"/>
           </a:xfrm>
           <a:prstGeom prst="rect">
@@ -47777,7 +47777,7 @@
         </p:nvSpPr>
         <p:spPr>
           <a:xfrm>
-            <a:off x="5244998" y="1784717"/>
+            <a:off x="5206136" y="1717406"/>
             <a:ext cx="548640" cy="365760"/>
           </a:xfrm>
           <a:prstGeom prst="rect">
@@ -47816,7 +47816,7 @@
         </p:nvSpPr>
         <p:spPr>
           <a:xfrm>
-            <a:off x="5820156" y="1630604"/>
+            <a:off x="5820156" y="1552880"/>
             <a:ext cx="548640" cy="365760"/>
           </a:xfrm>
           <a:prstGeom prst="rect">
@@ -47856,7 +47856,7 @@
         <p:spPr>
           <a:xfrm>
             <a:off x="6094476" y="2963799"/>
-            <a:ext cx="750756" cy="201165"/>
+            <a:ext cx="660665" cy="177025"/>
           </a:xfrm>
           <a:prstGeom prst="line">
             <a:avLst/>
@@ -47879,7 +47879,7 @@
         <p:spPr>
           <a:xfrm>
             <a:off x="6094476" y="2963799"/>
-            <a:ext cx="0" cy="1212494"/>
+            <a:ext cx="0" cy="994867"/>
           </a:xfrm>
           <a:prstGeom prst="line">
             <a:avLst/>
@@ -49370,7 +49370,7 @@
         </p:nvSpPr>
         <p:spPr>
           <a:xfrm>
-            <a:off x="10199218" y="1784717"/>
+            <a:off x="10238080" y="1717406"/>
             <a:ext cx="548640" cy="365760"/>
           </a:xfrm>
           <a:prstGeom prst="rect">
@@ -49409,7 +49409,7 @@
         </p:nvSpPr>
         <p:spPr>
           <a:xfrm>
-            <a:off x="10620262" y="2205761"/>
+            <a:off x="10687573" y="2166899"/>
             <a:ext cx="548640" cy="365760"/>
           </a:xfrm>
           <a:prstGeom prst="rect">
@@ -49448,7 +49448,7 @@
         </p:nvSpPr>
         <p:spPr>
           <a:xfrm>
-            <a:off x="10774375" y="2780919"/>
+            <a:off x="10852099" y="2780919"/>
             <a:ext cx="548640" cy="365760"/>
           </a:xfrm>
           <a:prstGeom prst="rect">
@@ -49487,7 +49487,7 @@
         </p:nvSpPr>
         <p:spPr>
           <a:xfrm>
-            <a:off x="10620262" y="3356077"/>
+            <a:off x="10687573" y="3394939"/>
             <a:ext cx="548640" cy="365760"/>
           </a:xfrm>
           <a:prstGeom prst="rect">
@@ -49526,7 +49526,7 @@
         </p:nvSpPr>
         <p:spPr>
           <a:xfrm>
-            <a:off x="10199218" y="3777121"/>
+            <a:off x="10238080" y="3844432"/>
             <a:ext cx="548640" cy="365760"/>
           </a:xfrm>
           <a:prstGeom prst="rect">
@@ -49565,7 +49565,7 @@
         </p:nvSpPr>
         <p:spPr>
           <a:xfrm>
-            <a:off x="9624060" y="3931234"/>
+            <a:off x="9624060" y="4008958"/>
             <a:ext cx="548640" cy="365760"/>
           </a:xfrm>
           <a:prstGeom prst="rect">
@@ -49604,7 +49604,7 @@
         </p:nvSpPr>
         <p:spPr>
           <a:xfrm>
-            <a:off x="9048902" y="3777121"/>
+            <a:off x="9010040" y="3844432"/>
             <a:ext cx="548640" cy="365760"/>
           </a:xfrm>
           <a:prstGeom prst="rect">
@@ -49643,7 +49643,7 @@
         </p:nvSpPr>
         <p:spPr>
           <a:xfrm>
-            <a:off x="8627858" y="3356077"/>
+            <a:off x="8560547" y="3394939"/>
             <a:ext cx="548640" cy="365760"/>
           </a:xfrm>
           <a:prstGeom prst="rect">
@@ -49682,7 +49682,7 @@
         </p:nvSpPr>
         <p:spPr>
           <a:xfrm>
-            <a:off x="8473745" y="2780919"/>
+            <a:off x="8396021" y="2780919"/>
             <a:ext cx="548640" cy="365760"/>
           </a:xfrm>
           <a:prstGeom prst="rect">
@@ -49721,7 +49721,7 @@
         </p:nvSpPr>
         <p:spPr>
           <a:xfrm>
-            <a:off x="8627858" y="2205761"/>
+            <a:off x="8560547" y="2166899"/>
             <a:ext cx="548640" cy="365760"/>
           </a:xfrm>
           <a:prstGeom prst="rect">
@@ -49760,7 +49760,7 @@
         </p:nvSpPr>
         <p:spPr>
           <a:xfrm>
-            <a:off x="9048902" y="1784717"/>
+            <a:off x="9010040" y="1717406"/>
             <a:ext cx="548640" cy="365760"/>
           </a:xfrm>
           <a:prstGeom prst="rect">
@@ -49799,7 +49799,7 @@
         </p:nvSpPr>
         <p:spPr>
           <a:xfrm>
-            <a:off x="9624060" y="1630604"/>
+            <a:off x="9624060" y="1552880"/>
             <a:ext cx="548640" cy="365760"/>
           </a:xfrm>
           <a:prstGeom prst="rect">
@@ -49839,7 +49839,7 @@
         <p:spPr>
           <a:xfrm>
             <a:off x="9898380" y="2963799"/>
-            <a:ext cx="673110" cy="388620"/>
+            <a:ext cx="592336" cy="341986"/>
           </a:xfrm>
           <a:prstGeom prst="line">
             <a:avLst/>
@@ -49861,8 +49861,8 @@
         </p:nvSpPr>
         <p:spPr>
           <a:xfrm flipV="1">
-            <a:off x="9898380" y="1751305"/>
-            <a:ext cx="0" cy="1212494"/>
+            <a:off x="9898380" y="1968932"/>
+            <a:ext cx="0" cy="994867"/>
           </a:xfrm>
           <a:prstGeom prst="line">
             <a:avLst/>
@@ -51506,7 +51506,7 @@
         </p:nvSpPr>
         <p:spPr>
           <a:xfrm>
-            <a:off x="9581449" y="3232898"/>
+            <a:off x="9620311" y="3165587"/>
             <a:ext cx="548640" cy="365760"/>
           </a:xfrm>
           <a:prstGeom prst="rect">
@@ -51545,7 +51545,7 @@
         </p:nvSpPr>
         <p:spPr>
           <a:xfrm>
-            <a:off x="10002494" y="3653942"/>
+            <a:off x="10069805" y="3615080"/>
             <a:ext cx="548640" cy="365760"/>
           </a:xfrm>
           <a:prstGeom prst="rect">
@@ -51584,7 +51584,7 @@
         </p:nvSpPr>
         <p:spPr>
           <a:xfrm>
-            <a:off x="10156607" y="4229100"/>
+            <a:off x="10234331" y="4229100"/>
             <a:ext cx="548640" cy="365760"/>
           </a:xfrm>
           <a:prstGeom prst="rect">
@@ -51623,7 +51623,7 @@
         </p:nvSpPr>
         <p:spPr>
           <a:xfrm>
-            <a:off x="10002494" y="4804258"/>
+            <a:off x="10069805" y="4843120"/>
             <a:ext cx="548640" cy="365760"/>
           </a:xfrm>
           <a:prstGeom prst="rect">
@@ -51662,7 +51662,7 @@
         </p:nvSpPr>
         <p:spPr>
           <a:xfrm>
-            <a:off x="9581449" y="5225302"/>
+            <a:off x="9620311" y="5292613"/>
             <a:ext cx="548640" cy="365760"/>
           </a:xfrm>
           <a:prstGeom prst="rect">
@@ -51701,7 +51701,7 @@
         </p:nvSpPr>
         <p:spPr>
           <a:xfrm>
-            <a:off x="9006291" y="5379415"/>
+            <a:off x="9006291" y="5457139"/>
             <a:ext cx="548640" cy="365760"/>
           </a:xfrm>
           <a:prstGeom prst="rect">
@@ -51740,7 +51740,7 @@
         </p:nvSpPr>
         <p:spPr>
           <a:xfrm>
-            <a:off x="8431134" y="5225302"/>
+            <a:off x="8392272" y="5292613"/>
             <a:ext cx="548640" cy="365760"/>
           </a:xfrm>
           <a:prstGeom prst="rect">
@@ -51779,7 +51779,7 @@
         </p:nvSpPr>
         <p:spPr>
           <a:xfrm>
-            <a:off x="8010089" y="4804258"/>
+            <a:off x="7942778" y="4843120"/>
             <a:ext cx="548640" cy="365760"/>
           </a:xfrm>
           <a:prstGeom prst="rect">
@@ -51818,7 +51818,7 @@
         </p:nvSpPr>
         <p:spPr>
           <a:xfrm>
-            <a:off x="7855976" y="4229100"/>
+            <a:off x="7778252" y="4229100"/>
             <a:ext cx="548640" cy="365760"/>
           </a:xfrm>
           <a:prstGeom prst="rect">
@@ -51857,7 +51857,7 @@
         </p:nvSpPr>
         <p:spPr>
           <a:xfrm>
-            <a:off x="8010089" y="3653942"/>
+            <a:off x="7942778" y="3615080"/>
             <a:ext cx="548640" cy="365760"/>
           </a:xfrm>
           <a:prstGeom prst="rect">
@@ -51896,7 +51896,7 @@
         </p:nvSpPr>
         <p:spPr>
           <a:xfrm>
-            <a:off x="8431134" y="3232898"/>
+            <a:off x="8392272" y="3165587"/>
             <a:ext cx="548640" cy="365760"/>
           </a:xfrm>
           <a:prstGeom prst="rect">
@@ -51935,7 +51935,7 @@
         </p:nvSpPr>
         <p:spPr>
           <a:xfrm>
-            <a:off x="9006291" y="3078785"/>
+            <a:off x="9006291" y="3001061"/>
             <a:ext cx="548640" cy="365760"/>
           </a:xfrm>
           <a:prstGeom prst="rect">
@@ -51974,8 +51974,8 @@
         </p:nvSpPr>
         <p:spPr>
           <a:xfrm flipH="1">
-            <a:off x="8731020" y="4411980"/>
-            <a:ext cx="549592" cy="549592"/>
+            <a:off x="8796971" y="4411980"/>
+            <a:ext cx="483641" cy="483641"/>
           </a:xfrm>
           <a:prstGeom prst="line">
             <a:avLst/>
@@ -51998,7 +51998,7 @@
         <p:spPr>
           <a:xfrm>
             <a:off x="9280611" y="4411980"/>
-            <a:ext cx="0" cy="1212494"/>
+            <a:ext cx="0" cy="994867"/>
           </a:xfrm>
           <a:prstGeom prst="line">
             <a:avLst/>

--- a/dist/초1/수학/시간과규칙/초1_수학_시간과규칙_01_몇시와몇시30분_학생용.pptx
+++ b/dist/초1/수학/시간과규칙/초1_수학_시간과규칙_01_몇시와몇시30분_학생용.pptx
@@ -121,13 +121,13 @@
   <p:extLst>
     <p:ext uri="{521415D9-36F7-43E2-AB2F-B90AF26B5E84}">
       <p14:sectionLst xmlns:p14="http://schemas.microsoft.com/office/powerpoint/2010/main">
-        <p14:section name="도입" id="{93067bfd-ca4f-fd82-f4c6-9ee348cb9676}">
+        <p14:section name="도입" id="{9628f738-3faf-f006-5110-6cfe65cb3604}">
           <p14:sldIdLst>
             <p14:sldId id="256"/>
             <p14:sldId id="257"/>
           </p14:sldIdLst>
         </p14:section>
-        <p14:section name="개념" id="{a2926eb3-74e3-f7b6-037c-6de1b59eecfe}">
+        <p14:section name="개념" id="{2fcb5bdd-8598-7780-db85-bfdc0e109b07}">
           <p14:sldIdLst>
             <p14:sldId id="258"/>
             <p14:sldId id="259"/>
@@ -137,31 +137,31 @@
             <p14:sldId id="264"/>
           </p14:sldIdLst>
         </p14:section>
-        <p14:section name="연습" id="{4f722b8d-1d10-5992-a095-c726d1edc71d}">
+        <p14:section name="연습" id="{4366d18d-c61e-f3ca-9988-9342d2a78554}">
           <p14:sldIdLst>
             <p14:sldId id="261"/>
             <p14:sldId id="265"/>
             <p14:sldId id="266"/>
           </p14:sldIdLst>
         </p14:section>
-        <p14:section name="개념" id="{ecc1d203-a35e-219f-bf2b-6c1d2ac9da57}">
+        <p14:section name="개념" id="{b220f63a-70cc-540a-1b74-d830d41d76b0}">
           <p14:sldIdLst/>
         </p14:section>
-        <p14:section name="연습" id="{f0b1035b-5abe-c8f2-ef1d-7854d979f71a}">
+        <p14:section name="연습" id="{3a0d0694-ddc4-2ae9-837f-5279749293c6}">
           <p14:sldIdLst/>
         </p14:section>
-        <p14:section name="확인" id="{2cda7c53-eb4c-42c7-5330-89b5417f7708}">
+        <p14:section name="확인" id="{213c553d-7cc8-3806-eb52-445fd9d020db}">
           <p14:sldIdLst>
             <p14:sldId id="267"/>
             <p14:sldId id="268"/>
           </p14:sldIdLst>
         </p14:section>
-        <p14:section name="정리" id="{658b4bf7-bec8-06f8-1af1-c2a3ddbdbfc3}">
+        <p14:section name="정리" id="{69baa5d3-2ddb-00cf-fd0f-4e4299435cc8}">
           <p14:sldIdLst>
             <p14:sldId id="269"/>
           </p14:sldIdLst>
         </p14:section>
-        <p14:section name="보충" id="{143cffb3-07cf-129b-826e-ad29966639f1}">
+        <p14:section name="보충" id="{5e8b1893-cc26-d491-4f20-483bb935d637}">
           <p14:sldIdLst>
             <p14:sldId id="270"/>
           </p14:sldIdLst>
@@ -52045,7 +52045,7 @@
         </p:nvSpPr>
         <p:spPr>
           <a:xfrm>
-            <a:off x="548640" y="3559556"/>
+            <a:off x="548640" y="3383788"/>
             <a:ext cx="548640" cy="548640"/>
           </a:xfrm>
           <a:prstGeom prst="ellipse">
@@ -52090,8 +52090,8 @@
         </p:nvSpPr>
         <p:spPr>
           <a:xfrm>
-            <a:off x="1325880" y="3559556"/>
-            <a:ext cx="5229271" cy="548640"/>
+            <a:off x="1325880" y="3338068"/>
+            <a:ext cx="5229271" cy="991616"/>
           </a:xfrm>
           <a:prstGeom prst="rect">
             <a:avLst/>
@@ -52129,7 +52129,7 @@
         </p:nvSpPr>
         <p:spPr>
           <a:xfrm>
-            <a:off x="548640" y="4318508"/>
+            <a:off x="548640" y="4539996"/>
             <a:ext cx="548640" cy="548640"/>
           </a:xfrm>
           <a:prstGeom prst="ellipse">
@@ -52174,7 +52174,7 @@
         </p:nvSpPr>
         <p:spPr>
           <a:xfrm>
-            <a:off x="1325880" y="4272788"/>
+            <a:off x="1325880" y="4494276"/>
             <a:ext cx="5229271" cy="991616"/>
           </a:xfrm>
           <a:prstGeom prst="rect">
